--- a/source/Overview/images_FrameworkStack/materialFrameworkStack.pptx
+++ b/source/Overview/images_FrameworkStack/materialFrameworkStack.pptx
@@ -5,12 +5,11 @@
     <p:sldMasterId id="2147483648" r:id="rId1"/>
   </p:sldMasterIdLst>
   <p:notesMasterIdLst>
-    <p:notesMasterId r:id="rId5"/>
+    <p:notesMasterId r:id="rId4"/>
   </p:notesMasterIdLst>
   <p:sldIdLst>
     <p:sldId id="272" r:id="rId2"/>
     <p:sldId id="337" r:id="rId3"/>
-    <p:sldId id="339" r:id="rId4"/>
   </p:sldIdLst>
   <p:sldSz cx="9144000" cy="6858000" type="screen4x3"/>
   <p:notesSz cx="6858000" cy="9144000"/>
@@ -116,7 +115,6 @@
           <p14:sldIdLst>
             <p14:sldId id="272"/>
             <p14:sldId id="337"/>
-            <p14:sldId id="339"/>
           </p14:sldIdLst>
         </p14:section>
       </p14:sectionLst>
@@ -221,7 +219,7 @@
           <a:p>
             <a:fld id="{3BB47352-BF5A-4CD2-B029-996118CD8E01}" type="datetimeFigureOut">
               <a:rPr kumimoji="1" lang="ja-JP" altLang="en-US" smtClean="0"/>
-              <a:t>2024/12/24</a:t>
+              <a:t>2025/6/12</a:t>
             </a:fld>
             <a:endParaRPr kumimoji="1" lang="ja-JP" altLang="en-US"/>
           </a:p>
@@ -688,90 +686,6 @@
 </p:notes>
 </file>
 
-<file path=ppt/notesSlides/notesSlide3.xml><?xml version="1.0" encoding="utf-8"?>
-<p:notes xmlns:a="http://schemas.openxmlformats.org/drawingml/2006/main" xmlns:r="http://schemas.openxmlformats.org/officeDocument/2006/relationships" xmlns:p="http://schemas.openxmlformats.org/presentationml/2006/main">
-  <p:cSld>
-    <p:spTree>
-      <p:nvGrpSpPr>
-        <p:cNvPr id="1" name=""/>
-        <p:cNvGrpSpPr/>
-        <p:nvPr/>
-      </p:nvGrpSpPr>
-      <p:grpSpPr>
-        <a:xfrm>
-          <a:off x="0" y="0"/>
-          <a:ext cx="0" cy="0"/>
-          <a:chOff x="0" y="0"/>
-          <a:chExt cx="0" cy="0"/>
-        </a:xfrm>
-      </p:grpSpPr>
-      <p:sp>
-        <p:nvSpPr>
-          <p:cNvPr id="2" name="スライド イメージ プレースホルダー 1"/>
-          <p:cNvSpPr>
-            <a:spLocks noGrp="1" noRot="1" noChangeAspect="1"/>
-          </p:cNvSpPr>
-          <p:nvPr>
-            <p:ph type="sldImg"/>
-          </p:nvPr>
-        </p:nvSpPr>
-        <p:spPr/>
-      </p:sp>
-      <p:sp>
-        <p:nvSpPr>
-          <p:cNvPr id="3" name="ノート プレースホルダー 2"/>
-          <p:cNvSpPr>
-            <a:spLocks noGrp="1"/>
-          </p:cNvSpPr>
-          <p:nvPr>
-            <p:ph type="body" idx="1"/>
-          </p:nvPr>
-        </p:nvSpPr>
-        <p:spPr/>
-        <p:txBody>
-          <a:bodyPr/>
-          <a:lstStyle/>
-          <a:p>
-            <a:endParaRPr kumimoji="1" lang="ja-JP" altLang="en-US" dirty="0"/>
-          </a:p>
-        </p:txBody>
-      </p:sp>
-      <p:sp>
-        <p:nvSpPr>
-          <p:cNvPr id="4" name="スライド番号プレースホルダー 3"/>
-          <p:cNvSpPr>
-            <a:spLocks noGrp="1"/>
-          </p:cNvSpPr>
-          <p:nvPr>
-            <p:ph type="sldNum" sz="quarter" idx="10"/>
-          </p:nvPr>
-        </p:nvSpPr>
-        <p:spPr/>
-        <p:txBody>
-          <a:bodyPr/>
-          <a:lstStyle/>
-          <a:p>
-            <a:fld id="{003CFFA3-9D07-4088-826B-DF328166082C}" type="slidenum">
-              <a:rPr kumimoji="1" lang="ja-JP" altLang="en-US" smtClean="0"/>
-              <a:t>3</a:t>
-            </a:fld>
-            <a:endParaRPr kumimoji="1" lang="ja-JP" altLang="en-US"/>
-          </a:p>
-        </p:txBody>
-      </p:sp>
-    </p:spTree>
-    <p:extLst>
-      <p:ext uri="{BB962C8B-B14F-4D97-AF65-F5344CB8AC3E}">
-        <p14:creationId xmlns:p14="http://schemas.microsoft.com/office/powerpoint/2010/main" val="1282525066"/>
-      </p:ext>
-    </p:extLst>
-  </p:cSld>
-  <p:clrMapOvr>
-    <a:masterClrMapping/>
-  </p:clrMapOvr>
-</p:notes>
-</file>
-
 <file path=ppt/slideLayouts/slideLayout1.xml><?xml version="1.0" encoding="utf-8"?>
 <p:sldLayout xmlns:a="http://schemas.openxmlformats.org/drawingml/2006/main" xmlns:r="http://schemas.openxmlformats.org/officeDocument/2006/relationships" xmlns:p="http://schemas.openxmlformats.org/presentationml/2006/main" type="title" preserve="1">
   <p:cSld name="タイトル スライド">
@@ -951,7 +865,7 @@
           <a:p>
             <a:fld id="{7B9B12EC-6AA0-374B-A2D3-850081A07A26}" type="datetimeFigureOut">
               <a:rPr kumimoji="1" lang="ja-JP" altLang="en-US" smtClean="0"/>
-              <a:t>2024/12/24</a:t>
+              <a:t>2025/6/12</a:t>
             </a:fld>
             <a:endParaRPr kumimoji="1" lang="ja-JP" altLang="en-US"/>
           </a:p>
@@ -1151,7 +1065,7 @@
           <a:p>
             <a:fld id="{7B9B12EC-6AA0-374B-A2D3-850081A07A26}" type="datetimeFigureOut">
               <a:rPr kumimoji="1" lang="ja-JP" altLang="en-US" smtClean="0"/>
-              <a:t>2024/12/24</a:t>
+              <a:t>2025/6/12</a:t>
             </a:fld>
             <a:endParaRPr kumimoji="1" lang="ja-JP" altLang="en-US"/>
           </a:p>
@@ -1361,7 +1275,7 @@
           <a:p>
             <a:fld id="{7B9B12EC-6AA0-374B-A2D3-850081A07A26}" type="datetimeFigureOut">
               <a:rPr kumimoji="1" lang="ja-JP" altLang="en-US" smtClean="0"/>
-              <a:t>2024/12/24</a:t>
+              <a:t>2025/6/12</a:t>
             </a:fld>
             <a:endParaRPr kumimoji="1" lang="ja-JP" altLang="en-US"/>
           </a:p>
@@ -1561,7 +1475,7 @@
           <a:p>
             <a:fld id="{7B9B12EC-6AA0-374B-A2D3-850081A07A26}" type="datetimeFigureOut">
               <a:rPr kumimoji="1" lang="ja-JP" altLang="en-US" smtClean="0"/>
-              <a:t>2024/12/24</a:t>
+              <a:t>2025/6/12</a:t>
             </a:fld>
             <a:endParaRPr kumimoji="1" lang="ja-JP" altLang="en-US"/>
           </a:p>
@@ -1806,7 +1720,7 @@
           <a:p>
             <a:fld id="{7B9B12EC-6AA0-374B-A2D3-850081A07A26}" type="datetimeFigureOut">
               <a:rPr kumimoji="1" lang="ja-JP" altLang="en-US" smtClean="0"/>
-              <a:t>2024/12/24</a:t>
+              <a:t>2025/6/12</a:t>
             </a:fld>
             <a:endParaRPr kumimoji="1" lang="ja-JP" altLang="en-US"/>
           </a:p>
@@ -2155,7 +2069,7 @@
           <a:p>
             <a:fld id="{7B9B12EC-6AA0-374B-A2D3-850081A07A26}" type="datetimeFigureOut">
               <a:rPr kumimoji="1" lang="ja-JP" altLang="en-US" smtClean="0"/>
-              <a:t>2024/12/24</a:t>
+              <a:t>2025/6/12</a:t>
             </a:fld>
             <a:endParaRPr kumimoji="1" lang="ja-JP" altLang="en-US"/>
           </a:p>
@@ -2638,7 +2552,7 @@
           <a:p>
             <a:fld id="{7B9B12EC-6AA0-374B-A2D3-850081A07A26}" type="datetimeFigureOut">
               <a:rPr kumimoji="1" lang="ja-JP" altLang="en-US" smtClean="0"/>
-              <a:t>2024/12/24</a:t>
+              <a:t>2025/6/12</a:t>
             </a:fld>
             <a:endParaRPr kumimoji="1" lang="ja-JP" altLang="en-US"/>
           </a:p>
@@ -2755,7 +2669,7 @@
           <a:p>
             <a:fld id="{7B9B12EC-6AA0-374B-A2D3-850081A07A26}" type="datetimeFigureOut">
               <a:rPr kumimoji="1" lang="ja-JP" altLang="en-US" smtClean="0"/>
-              <a:t>2024/12/24</a:t>
+              <a:t>2025/6/12</a:t>
             </a:fld>
             <a:endParaRPr kumimoji="1" lang="ja-JP" altLang="en-US"/>
           </a:p>
@@ -2850,7 +2764,7 @@
           <a:p>
             <a:fld id="{7B9B12EC-6AA0-374B-A2D3-850081A07A26}" type="datetimeFigureOut">
               <a:rPr kumimoji="1" lang="ja-JP" altLang="en-US" smtClean="0"/>
-              <a:t>2024/12/24</a:t>
+              <a:t>2025/6/12</a:t>
             </a:fld>
             <a:endParaRPr kumimoji="1" lang="ja-JP" altLang="en-US"/>
           </a:p>
@@ -3157,7 +3071,7 @@
           <a:p>
             <a:fld id="{7B9B12EC-6AA0-374B-A2D3-850081A07A26}" type="datetimeFigureOut">
               <a:rPr kumimoji="1" lang="ja-JP" altLang="en-US" smtClean="0"/>
-              <a:t>2024/12/24</a:t>
+              <a:t>2025/6/12</a:t>
             </a:fld>
             <a:endParaRPr kumimoji="1" lang="ja-JP" altLang="en-US"/>
           </a:p>
@@ -3409,7 +3323,7 @@
           <a:p>
             <a:fld id="{7B9B12EC-6AA0-374B-A2D3-850081A07A26}" type="datetimeFigureOut">
               <a:rPr kumimoji="1" lang="ja-JP" altLang="en-US" smtClean="0"/>
-              <a:t>2024/12/24</a:t>
+              <a:t>2025/6/12</a:t>
             </a:fld>
             <a:endParaRPr kumimoji="1" lang="ja-JP" altLang="en-US"/>
           </a:p>
@@ -3652,7 +3566,7 @@
           <a:p>
             <a:fld id="{7B9B12EC-6AA0-374B-A2D3-850081A07A26}" type="datetimeFigureOut">
               <a:rPr kumimoji="1" lang="ja-JP" altLang="en-US" smtClean="0"/>
-              <a:t>2024/12/24</a:t>
+              <a:t>2025/6/12</a:t>
             </a:fld>
             <a:endParaRPr kumimoji="1" lang="ja-JP" altLang="en-US"/>
           </a:p>
@@ -6598,2674 +6512,6 @@
     <p:extLst>
       <p:ext uri="{BB962C8B-B14F-4D97-AF65-F5344CB8AC3E}">
         <p14:creationId xmlns:p14="http://schemas.microsoft.com/office/powerpoint/2010/main" val="3110005173"/>
-      </p:ext>
-    </p:extLst>
-  </p:cSld>
-  <p:clrMapOvr>
-    <a:masterClrMapping/>
-  </p:clrMapOvr>
-</p:sld>
-</file>
-
-<file path=ppt/slides/slide3.xml><?xml version="1.0" encoding="utf-8"?>
-<p:sld xmlns:a="http://schemas.openxmlformats.org/drawingml/2006/main" xmlns:r="http://schemas.openxmlformats.org/officeDocument/2006/relationships" xmlns:p="http://schemas.openxmlformats.org/presentationml/2006/main">
-  <p:cSld>
-    <p:spTree>
-      <p:nvGrpSpPr>
-        <p:cNvPr id="1" name=""/>
-        <p:cNvGrpSpPr/>
-        <p:nvPr/>
-      </p:nvGrpSpPr>
-      <p:grpSpPr>
-        <a:xfrm>
-          <a:off x="0" y="0"/>
-          <a:ext cx="0" cy="0"/>
-          <a:chOff x="0" y="0"/>
-          <a:chExt cx="0" cy="0"/>
-        </a:xfrm>
-      </p:grpSpPr>
-      <p:sp>
-        <p:nvSpPr>
-          <p:cNvPr id="46" name="角丸四角形 45"/>
-          <p:cNvSpPr/>
-          <p:nvPr/>
-        </p:nvSpPr>
-        <p:spPr>
-          <a:xfrm>
-            <a:off x="5379438" y="4028081"/>
-            <a:ext cx="3387338" cy="368242"/>
-          </a:xfrm>
-          <a:prstGeom prst="roundRect">
-            <a:avLst/>
-          </a:prstGeom>
-          <a:gradFill>
-            <a:gsLst>
-              <a:gs pos="0">
-                <a:schemeClr val="bg1">
-                  <a:lumMod val="75000"/>
-                </a:schemeClr>
-              </a:gs>
-              <a:gs pos="100000">
-                <a:schemeClr val="bg1">
-                  <a:lumMod val="95000"/>
-                </a:schemeClr>
-              </a:gs>
-            </a:gsLst>
-          </a:gradFill>
-        </p:spPr>
-        <p:style>
-          <a:lnRef idx="1">
-            <a:schemeClr val="dk1"/>
-          </a:lnRef>
-          <a:fillRef idx="3">
-            <a:schemeClr val="dk1"/>
-          </a:fillRef>
-          <a:effectRef idx="2">
-            <a:schemeClr val="dk1"/>
-          </a:effectRef>
-          <a:fontRef idx="minor">
-            <a:schemeClr val="lt1"/>
-          </a:fontRef>
-        </p:style>
-        <p:txBody>
-          <a:bodyPr rtlCol="0" anchor="ctr"/>
-          <a:lstStyle/>
-          <a:p>
-            <a:pPr algn="ctr"/>
-            <a:r>
-              <a:rPr lang="en-US" altLang="ja-JP" sz="1600" dirty="0">
-                <a:solidFill>
-                  <a:schemeClr val="tx1">
-                    <a:lumMod val="75000"/>
-                    <a:lumOff val="25000"/>
-                  </a:schemeClr>
-                </a:solidFill>
-              </a:rPr>
-              <a:t>security-core-dependencies</a:t>
-            </a:r>
-            <a:endParaRPr kumimoji="1" lang="en-US" altLang="ja-JP" sz="1600" dirty="0">
-              <a:solidFill>
-                <a:schemeClr val="tx1">
-                  <a:lumMod val="75000"/>
-                  <a:lumOff val="25000"/>
-                </a:schemeClr>
-              </a:solidFill>
-            </a:endParaRPr>
-          </a:p>
-        </p:txBody>
-      </p:sp>
-      <p:sp>
-        <p:nvSpPr>
-          <p:cNvPr id="47" name="角丸四角形 46"/>
-          <p:cNvSpPr/>
-          <p:nvPr/>
-        </p:nvSpPr>
-        <p:spPr>
-          <a:xfrm>
-            <a:off x="391508" y="3312250"/>
-            <a:ext cx="3363924" cy="368242"/>
-          </a:xfrm>
-          <a:prstGeom prst="roundRect">
-            <a:avLst/>
-          </a:prstGeom>
-          <a:gradFill>
-            <a:gsLst>
-              <a:gs pos="0">
-                <a:schemeClr val="bg1">
-                  <a:lumMod val="75000"/>
-                </a:schemeClr>
-              </a:gs>
-              <a:gs pos="100000">
-                <a:schemeClr val="bg1">
-                  <a:lumMod val="95000"/>
-                </a:schemeClr>
-              </a:gs>
-            </a:gsLst>
-          </a:gradFill>
-        </p:spPr>
-        <p:style>
-          <a:lnRef idx="1">
-            <a:schemeClr val="dk1"/>
-          </a:lnRef>
-          <a:fillRef idx="3">
-            <a:schemeClr val="dk1"/>
-          </a:fillRef>
-          <a:effectRef idx="2">
-            <a:schemeClr val="dk1"/>
-          </a:effectRef>
-          <a:fontRef idx="minor">
-            <a:schemeClr val="lt1"/>
-          </a:fontRef>
-        </p:style>
-        <p:txBody>
-          <a:bodyPr rtlCol="0" anchor="ctr"/>
-          <a:lstStyle/>
-          <a:p>
-            <a:pPr algn="ctr"/>
-            <a:r>
-              <a:rPr lang="en-US" altLang="ja-JP" sz="1600" dirty="0">
-                <a:solidFill>
-                  <a:schemeClr val="tx1">
-                    <a:lumMod val="75000"/>
-                    <a:lumOff val="25000"/>
-                  </a:schemeClr>
-                </a:solidFill>
-              </a:rPr>
-              <a:t>security-web</a:t>
-            </a:r>
-            <a:endParaRPr kumimoji="1" lang="en-US" altLang="ja-JP" sz="1600" dirty="0">
-              <a:solidFill>
-                <a:schemeClr val="tx1">
-                  <a:lumMod val="75000"/>
-                  <a:lumOff val="25000"/>
-                </a:schemeClr>
-              </a:solidFill>
-            </a:endParaRPr>
-          </a:p>
-        </p:txBody>
-      </p:sp>
-      <p:sp>
-        <p:nvSpPr>
-          <p:cNvPr id="48" name="角丸四角形 47"/>
-          <p:cNvSpPr/>
-          <p:nvPr/>
-        </p:nvSpPr>
-        <p:spPr>
-          <a:xfrm>
-            <a:off x="5412773" y="6183763"/>
-            <a:ext cx="3363925" cy="368242"/>
-          </a:xfrm>
-          <a:prstGeom prst="roundRect">
-            <a:avLst/>
-          </a:prstGeom>
-          <a:gradFill>
-            <a:gsLst>
-              <a:gs pos="0">
-                <a:schemeClr val="bg1">
-                  <a:lumMod val="75000"/>
-                </a:schemeClr>
-              </a:gs>
-              <a:gs pos="100000">
-                <a:schemeClr val="bg1">
-                  <a:lumMod val="95000"/>
-                </a:schemeClr>
-              </a:gs>
-            </a:gsLst>
-          </a:gradFill>
-        </p:spPr>
-        <p:style>
-          <a:lnRef idx="1">
-            <a:schemeClr val="dk1"/>
-          </a:lnRef>
-          <a:fillRef idx="3">
-            <a:schemeClr val="dk1"/>
-          </a:fillRef>
-          <a:effectRef idx="2">
-            <a:schemeClr val="dk1"/>
-          </a:effectRef>
-          <a:fontRef idx="minor">
-            <a:schemeClr val="lt1"/>
-          </a:fontRef>
-        </p:style>
-        <p:txBody>
-          <a:bodyPr rtlCol="0" anchor="ctr"/>
-          <a:lstStyle/>
-          <a:p>
-            <a:pPr algn="ctr"/>
-            <a:r>
-              <a:rPr lang="en-US" altLang="ja-JP" sz="1600" dirty="0">
-                <a:solidFill>
-                  <a:schemeClr val="tx1">
-                    <a:lumMod val="75000"/>
-                    <a:lumOff val="25000"/>
-                  </a:schemeClr>
-                </a:solidFill>
-              </a:rPr>
-              <a:t>recommended-dependencies</a:t>
-            </a:r>
-            <a:endParaRPr kumimoji="1" lang="en-US" altLang="ja-JP" sz="1600" dirty="0">
-              <a:solidFill>
-                <a:schemeClr val="tx1">
-                  <a:lumMod val="75000"/>
-                  <a:lumOff val="25000"/>
-                </a:schemeClr>
-              </a:solidFill>
-            </a:endParaRPr>
-          </a:p>
-        </p:txBody>
-      </p:sp>
-      <p:sp>
-        <p:nvSpPr>
-          <p:cNvPr id="49" name="角丸四角形 48"/>
-          <p:cNvSpPr/>
-          <p:nvPr/>
-        </p:nvSpPr>
-        <p:spPr>
-          <a:xfrm>
-            <a:off x="5422944" y="6898281"/>
-            <a:ext cx="3353754" cy="368242"/>
-          </a:xfrm>
-          <a:prstGeom prst="roundRect">
-            <a:avLst/>
-          </a:prstGeom>
-          <a:gradFill>
-            <a:gsLst>
-              <a:gs pos="0">
-                <a:schemeClr val="bg1">
-                  <a:lumMod val="75000"/>
-                </a:schemeClr>
-              </a:gs>
-              <a:gs pos="100000">
-                <a:schemeClr val="bg1">
-                  <a:lumMod val="95000"/>
-                </a:schemeClr>
-              </a:gs>
-            </a:gsLst>
-          </a:gradFill>
-        </p:spPr>
-        <p:style>
-          <a:lnRef idx="1">
-            <a:schemeClr val="dk1"/>
-          </a:lnRef>
-          <a:fillRef idx="3">
-            <a:schemeClr val="dk1"/>
-          </a:fillRef>
-          <a:effectRef idx="2">
-            <a:schemeClr val="dk1"/>
-          </a:effectRef>
-          <a:fontRef idx="minor">
-            <a:schemeClr val="lt1"/>
-          </a:fontRef>
-        </p:style>
-        <p:txBody>
-          <a:bodyPr rtlCol="0" anchor="ctr"/>
-          <a:lstStyle/>
-          <a:p>
-            <a:pPr algn="ctr"/>
-            <a:r>
-              <a:rPr lang="en-US" altLang="ja-JP" sz="1600" dirty="0">
-                <a:solidFill>
-                  <a:schemeClr val="tx1">
-                    <a:lumMod val="75000"/>
-                    <a:lumOff val="25000"/>
-                  </a:schemeClr>
-                </a:solidFill>
-              </a:rPr>
-              <a:t>recommended-web-dependencies</a:t>
-            </a:r>
-            <a:endParaRPr kumimoji="1" lang="en-US" altLang="ja-JP" sz="1600" dirty="0">
-              <a:solidFill>
-                <a:schemeClr val="tx1">
-                  <a:lumMod val="75000"/>
-                  <a:lumOff val="25000"/>
-                </a:schemeClr>
-              </a:solidFill>
-            </a:endParaRPr>
-          </a:p>
-        </p:txBody>
-      </p:sp>
-      <p:sp>
-        <p:nvSpPr>
-          <p:cNvPr id="50" name="角丸四角形 49"/>
-          <p:cNvSpPr/>
-          <p:nvPr/>
-        </p:nvSpPr>
-        <p:spPr>
-          <a:xfrm>
-            <a:off x="5389360" y="4750246"/>
-            <a:ext cx="3387338" cy="368242"/>
-          </a:xfrm>
-          <a:prstGeom prst="roundRect">
-            <a:avLst/>
-          </a:prstGeom>
-          <a:gradFill>
-            <a:gsLst>
-              <a:gs pos="0">
-                <a:schemeClr val="bg1">
-                  <a:lumMod val="75000"/>
-                </a:schemeClr>
-              </a:gs>
-              <a:gs pos="100000">
-                <a:schemeClr val="bg1">
-                  <a:lumMod val="95000"/>
-                </a:schemeClr>
-              </a:gs>
-            </a:gsLst>
-          </a:gradFill>
-        </p:spPr>
-        <p:style>
-          <a:lnRef idx="1">
-            <a:schemeClr val="dk1"/>
-          </a:lnRef>
-          <a:fillRef idx="3">
-            <a:schemeClr val="dk1"/>
-          </a:fillRef>
-          <a:effectRef idx="2">
-            <a:schemeClr val="dk1"/>
-          </a:effectRef>
-          <a:fontRef idx="minor">
-            <a:schemeClr val="lt1"/>
-          </a:fontRef>
-        </p:style>
-        <p:txBody>
-          <a:bodyPr rtlCol="0" anchor="ctr"/>
-          <a:lstStyle/>
-          <a:p>
-            <a:pPr algn="ctr"/>
-            <a:r>
-              <a:rPr lang="en-US" altLang="ja-JP" sz="1600" dirty="0">
-                <a:solidFill>
-                  <a:schemeClr val="tx1">
-                    <a:lumMod val="75000"/>
-                    <a:lumOff val="25000"/>
-                  </a:schemeClr>
-                </a:solidFill>
-              </a:rPr>
-              <a:t>Mybatis3-dependencies</a:t>
-            </a:r>
-            <a:endParaRPr kumimoji="1" lang="en-US" altLang="ja-JP" sz="1600" dirty="0">
-              <a:solidFill>
-                <a:schemeClr val="tx1">
-                  <a:lumMod val="75000"/>
-                  <a:lumOff val="25000"/>
-                </a:schemeClr>
-              </a:solidFill>
-            </a:endParaRPr>
-          </a:p>
-        </p:txBody>
-      </p:sp>
-      <p:sp>
-        <p:nvSpPr>
-          <p:cNvPr id="51" name="角丸四角形 50"/>
-          <p:cNvSpPr/>
-          <p:nvPr/>
-        </p:nvSpPr>
-        <p:spPr>
-          <a:xfrm>
-            <a:off x="5402851" y="5469245"/>
-            <a:ext cx="3387338" cy="368242"/>
-          </a:xfrm>
-          <a:prstGeom prst="roundRect">
-            <a:avLst/>
-          </a:prstGeom>
-          <a:gradFill>
-            <a:gsLst>
-              <a:gs pos="0">
-                <a:schemeClr val="bg1">
-                  <a:lumMod val="75000"/>
-                </a:schemeClr>
-              </a:gs>
-              <a:gs pos="100000">
-                <a:schemeClr val="bg1">
-                  <a:lumMod val="95000"/>
-                </a:schemeClr>
-              </a:gs>
-            </a:gsLst>
-          </a:gradFill>
-        </p:spPr>
-        <p:style>
-          <a:lnRef idx="1">
-            <a:schemeClr val="dk1"/>
-          </a:lnRef>
-          <a:fillRef idx="3">
-            <a:schemeClr val="dk1"/>
-          </a:fillRef>
-          <a:effectRef idx="2">
-            <a:schemeClr val="dk1"/>
-          </a:effectRef>
-          <a:fontRef idx="minor">
-            <a:schemeClr val="lt1"/>
-          </a:fontRef>
-        </p:style>
-        <p:txBody>
-          <a:bodyPr rtlCol="0" anchor="ctr"/>
-          <a:lstStyle/>
-          <a:p>
-            <a:pPr algn="ctr"/>
-            <a:r>
-              <a:rPr kumimoji="1" lang="en-US" altLang="ja-JP" sz="1600" dirty="0" err="1">
-                <a:solidFill>
-                  <a:schemeClr val="tx1">
-                    <a:lumMod val="75000"/>
-                    <a:lumOff val="25000"/>
-                  </a:schemeClr>
-                </a:solidFill>
-              </a:rPr>
-              <a:t>Jpa</a:t>
-            </a:r>
-            <a:r>
-              <a:rPr kumimoji="1" lang="en-US" altLang="ja-JP" sz="1600" dirty="0">
-                <a:solidFill>
-                  <a:schemeClr val="tx1">
-                    <a:lumMod val="75000"/>
-                    <a:lumOff val="25000"/>
-                  </a:schemeClr>
-                </a:solidFill>
-              </a:rPr>
-              <a:t>-dependencies</a:t>
-            </a:r>
-          </a:p>
-        </p:txBody>
-      </p:sp>
-      <p:sp>
-        <p:nvSpPr>
-          <p:cNvPr id="52" name="角丸四角形 51"/>
-          <p:cNvSpPr/>
-          <p:nvPr/>
-        </p:nvSpPr>
-        <p:spPr>
-          <a:xfrm>
-            <a:off x="378016" y="1155256"/>
-            <a:ext cx="3387338" cy="368242"/>
-          </a:xfrm>
-          <a:prstGeom prst="roundRect">
-            <a:avLst/>
-          </a:prstGeom>
-          <a:gradFill>
-            <a:gsLst>
-              <a:gs pos="0">
-                <a:schemeClr val="bg1">
-                  <a:lumMod val="75000"/>
-                </a:schemeClr>
-              </a:gs>
-              <a:gs pos="100000">
-                <a:schemeClr val="bg1">
-                  <a:lumMod val="95000"/>
-                </a:schemeClr>
-              </a:gs>
-            </a:gsLst>
-          </a:gradFill>
-        </p:spPr>
-        <p:style>
-          <a:lnRef idx="1">
-            <a:schemeClr val="dk1"/>
-          </a:lnRef>
-          <a:fillRef idx="3">
-            <a:schemeClr val="dk1"/>
-          </a:fillRef>
-          <a:effectRef idx="2">
-            <a:schemeClr val="dk1"/>
-          </a:effectRef>
-          <a:fontRef idx="minor">
-            <a:schemeClr val="lt1"/>
-          </a:fontRef>
-        </p:style>
-        <p:txBody>
-          <a:bodyPr rtlCol="0" anchor="ctr"/>
-          <a:lstStyle/>
-          <a:p>
-            <a:pPr algn="ctr"/>
-            <a:r>
-              <a:rPr lang="en-US" altLang="ja-JP" sz="1600" dirty="0">
-                <a:solidFill>
-                  <a:schemeClr val="tx1">
-                    <a:lumMod val="75000"/>
-                    <a:lumOff val="25000"/>
-                  </a:schemeClr>
-                </a:solidFill>
-              </a:rPr>
-              <a:t>common</a:t>
-            </a:r>
-            <a:endParaRPr kumimoji="1" lang="en-US" altLang="ja-JP" sz="1600" dirty="0">
-              <a:solidFill>
-                <a:schemeClr val="tx1">
-                  <a:lumMod val="75000"/>
-                  <a:lumOff val="25000"/>
-                </a:schemeClr>
-              </a:solidFill>
-            </a:endParaRPr>
-          </a:p>
-        </p:txBody>
-      </p:sp>
-      <p:sp>
-        <p:nvSpPr>
-          <p:cNvPr id="53" name="角丸四角形 52"/>
-          <p:cNvSpPr/>
-          <p:nvPr/>
-        </p:nvSpPr>
-        <p:spPr>
-          <a:xfrm>
-            <a:off x="387939" y="1874254"/>
-            <a:ext cx="3377415" cy="368242"/>
-          </a:xfrm>
-          <a:prstGeom prst="roundRect">
-            <a:avLst/>
-          </a:prstGeom>
-          <a:gradFill>
-            <a:gsLst>
-              <a:gs pos="0">
-                <a:schemeClr val="bg1">
-                  <a:lumMod val="75000"/>
-                </a:schemeClr>
-              </a:gs>
-              <a:gs pos="100000">
-                <a:schemeClr val="bg1">
-                  <a:lumMod val="95000"/>
-                </a:schemeClr>
-              </a:gs>
-            </a:gsLst>
-          </a:gradFill>
-        </p:spPr>
-        <p:style>
-          <a:lnRef idx="1">
-            <a:schemeClr val="dk1"/>
-          </a:lnRef>
-          <a:fillRef idx="3">
-            <a:schemeClr val="dk1"/>
-          </a:fillRef>
-          <a:effectRef idx="2">
-            <a:schemeClr val="dk1"/>
-          </a:effectRef>
-          <a:fontRef idx="minor">
-            <a:schemeClr val="lt1"/>
-          </a:fontRef>
-        </p:style>
-        <p:txBody>
-          <a:bodyPr rtlCol="0" anchor="ctr"/>
-          <a:lstStyle/>
-          <a:p>
-            <a:pPr algn="ctr"/>
-            <a:r>
-              <a:rPr kumimoji="1" lang="en-US" altLang="ja-JP" sz="1600" dirty="0">
-                <a:solidFill>
-                  <a:schemeClr val="tx1">
-                    <a:lumMod val="75000"/>
-                    <a:lumOff val="25000"/>
-                  </a:schemeClr>
-                </a:solidFill>
-              </a:rPr>
-              <a:t>web</a:t>
-            </a:r>
-          </a:p>
-        </p:txBody>
-      </p:sp>
-      <p:cxnSp>
-        <p:nvCxnSpPr>
-          <p:cNvPr id="57" name="直線コネクタ 2"/>
-          <p:cNvCxnSpPr>
-            <a:stCxn id="60" idx="0"/>
-            <a:endCxn id="53" idx="2"/>
-          </p:cNvCxnSpPr>
-          <p:nvPr/>
-        </p:nvCxnSpPr>
-        <p:spPr>
-          <a:xfrm flipV="1">
-            <a:off x="2076647" y="2242496"/>
-            <a:ext cx="0" cy="350756"/>
-          </a:xfrm>
-          <a:prstGeom prst="straightConnector1">
-            <a:avLst/>
-          </a:prstGeom>
-          <a:ln w="12700" cmpd="sng">
-            <a:solidFill>
-              <a:schemeClr val="tx1">
-                <a:lumMod val="50000"/>
-                <a:lumOff val="50000"/>
-              </a:schemeClr>
-            </a:solidFill>
-            <a:prstDash val="sysDash"/>
-            <a:headEnd type="none"/>
-            <a:tailEnd type="arrow"/>
-          </a:ln>
-        </p:spPr>
-        <p:style>
-          <a:lnRef idx="2">
-            <a:schemeClr val="accent1"/>
-          </a:lnRef>
-          <a:fillRef idx="0">
-            <a:schemeClr val="accent1"/>
-          </a:fillRef>
-          <a:effectRef idx="1">
-            <a:schemeClr val="accent1"/>
-          </a:effectRef>
-          <a:fontRef idx="minor">
-            <a:schemeClr val="tx1"/>
-          </a:fontRef>
-        </p:style>
-      </p:cxnSp>
-      <p:sp>
-        <p:nvSpPr>
-          <p:cNvPr id="92" name="テキスト ボックス 91"/>
-          <p:cNvSpPr txBox="1"/>
-          <p:nvPr/>
-        </p:nvSpPr>
-        <p:spPr>
-          <a:xfrm>
-            <a:off x="2170906" y="2299501"/>
-            <a:ext cx="810851" cy="307777"/>
-          </a:xfrm>
-          <a:prstGeom prst="rect">
-            <a:avLst/>
-          </a:prstGeom>
-          <a:noFill/>
-        </p:spPr>
-        <p:txBody>
-          <a:bodyPr wrap="none" rtlCol="0">
-            <a:spAutoFit/>
-          </a:bodyPr>
-          <a:lstStyle/>
-          <a:p>
-            <a:r>
-              <a:rPr kumimoji="1" lang="en-US" altLang="ja-JP" sz="1400" dirty="0">
-                <a:solidFill>
-                  <a:schemeClr val="tx1">
-                    <a:lumMod val="50000"/>
-                    <a:lumOff val="50000"/>
-                  </a:schemeClr>
-                </a:solidFill>
-              </a:rPr>
-              <a:t>depends</a:t>
-            </a:r>
-            <a:endParaRPr kumimoji="1" lang="ja-JP" altLang="en-US" sz="1400" dirty="0">
-              <a:solidFill>
-                <a:schemeClr val="tx1">
-                  <a:lumMod val="50000"/>
-                  <a:lumOff val="50000"/>
-                </a:schemeClr>
-              </a:solidFill>
-            </a:endParaRPr>
-          </a:p>
-        </p:txBody>
-      </p:sp>
-      <p:sp>
-        <p:nvSpPr>
-          <p:cNvPr id="93" name="テキスト ボックス 92"/>
-          <p:cNvSpPr txBox="1"/>
-          <p:nvPr/>
-        </p:nvSpPr>
-        <p:spPr>
-          <a:xfrm>
-            <a:off x="99969" y="3034706"/>
-            <a:ext cx="810851" cy="307777"/>
-          </a:xfrm>
-          <a:prstGeom prst="rect">
-            <a:avLst/>
-          </a:prstGeom>
-          <a:noFill/>
-        </p:spPr>
-        <p:txBody>
-          <a:bodyPr wrap="none" rtlCol="0">
-            <a:spAutoFit/>
-          </a:bodyPr>
-          <a:lstStyle/>
-          <a:p>
-            <a:r>
-              <a:rPr kumimoji="1" lang="en-US" altLang="ja-JP" sz="1400" dirty="0">
-                <a:solidFill>
-                  <a:schemeClr val="tx1">
-                    <a:lumMod val="50000"/>
-                    <a:lumOff val="50000"/>
-                  </a:schemeClr>
-                </a:solidFill>
-              </a:rPr>
-              <a:t>depends</a:t>
-            </a:r>
-            <a:endParaRPr kumimoji="1" lang="ja-JP" altLang="en-US" sz="1400" dirty="0">
-              <a:solidFill>
-                <a:schemeClr val="tx1">
-                  <a:lumMod val="50000"/>
-                  <a:lumOff val="50000"/>
-                </a:schemeClr>
-              </a:solidFill>
-            </a:endParaRPr>
-          </a:p>
-        </p:txBody>
-      </p:sp>
-      <p:sp>
-        <p:nvSpPr>
-          <p:cNvPr id="34" name="角丸四角形 33"/>
-          <p:cNvSpPr/>
-          <p:nvPr/>
-        </p:nvSpPr>
-        <p:spPr>
-          <a:xfrm>
-            <a:off x="368094" y="4750246"/>
-            <a:ext cx="3387338" cy="368242"/>
-          </a:xfrm>
-          <a:prstGeom prst="roundRect">
-            <a:avLst/>
-          </a:prstGeom>
-          <a:gradFill>
-            <a:gsLst>
-              <a:gs pos="0">
-                <a:schemeClr val="bg1">
-                  <a:lumMod val="75000"/>
-                </a:schemeClr>
-              </a:gs>
-              <a:gs pos="100000">
-                <a:schemeClr val="bg1">
-                  <a:lumMod val="95000"/>
-                </a:schemeClr>
-              </a:gs>
-            </a:gsLst>
-          </a:gradFill>
-        </p:spPr>
-        <p:style>
-          <a:lnRef idx="1">
-            <a:schemeClr val="dk1"/>
-          </a:lnRef>
-          <a:fillRef idx="3">
-            <a:schemeClr val="dk1"/>
-          </a:fillRef>
-          <a:effectRef idx="2">
-            <a:schemeClr val="dk1"/>
-          </a:effectRef>
-          <a:fontRef idx="minor">
-            <a:schemeClr val="lt1"/>
-          </a:fontRef>
-        </p:style>
-        <p:txBody>
-          <a:bodyPr rtlCol="0" anchor="ctr"/>
-          <a:lstStyle/>
-          <a:p>
-            <a:pPr algn="ctr"/>
-            <a:r>
-              <a:rPr lang="en-US" altLang="ja-JP" sz="1600" dirty="0" err="1">
-                <a:solidFill>
-                  <a:schemeClr val="tx1">
-                    <a:lumMod val="75000"/>
-                    <a:lumOff val="25000"/>
-                  </a:schemeClr>
-                </a:solidFill>
-              </a:rPr>
-              <a:t>codepoints</a:t>
-            </a:r>
-            <a:endParaRPr kumimoji="1" lang="en-US" altLang="ja-JP" sz="1600" dirty="0">
-              <a:solidFill>
-                <a:schemeClr val="tx1">
-                  <a:lumMod val="75000"/>
-                  <a:lumOff val="25000"/>
-                </a:schemeClr>
-              </a:solidFill>
-            </a:endParaRPr>
-          </a:p>
-        </p:txBody>
-      </p:sp>
-      <p:sp>
-        <p:nvSpPr>
-          <p:cNvPr id="35" name="角丸四角形 34"/>
-          <p:cNvSpPr/>
-          <p:nvPr/>
-        </p:nvSpPr>
-        <p:spPr>
-          <a:xfrm>
-            <a:off x="368094" y="4031248"/>
-            <a:ext cx="3387338" cy="368242"/>
-          </a:xfrm>
-          <a:prstGeom prst="roundRect">
-            <a:avLst/>
-          </a:prstGeom>
-          <a:gradFill>
-            <a:gsLst>
-              <a:gs pos="0">
-                <a:schemeClr val="bg1">
-                  <a:lumMod val="75000"/>
-                </a:schemeClr>
-              </a:gs>
-              <a:gs pos="100000">
-                <a:schemeClr val="bg1">
-                  <a:lumMod val="95000"/>
-                </a:schemeClr>
-              </a:gs>
-            </a:gsLst>
-          </a:gradFill>
-        </p:spPr>
-        <p:style>
-          <a:lnRef idx="1">
-            <a:schemeClr val="dk1"/>
-          </a:lnRef>
-          <a:fillRef idx="3">
-            <a:schemeClr val="dk1"/>
-          </a:fillRef>
-          <a:effectRef idx="2">
-            <a:schemeClr val="dk1"/>
-          </a:effectRef>
-          <a:fontRef idx="minor">
-            <a:schemeClr val="lt1"/>
-          </a:fontRef>
-        </p:style>
-        <p:txBody>
-          <a:bodyPr rtlCol="0" anchor="ctr"/>
-          <a:lstStyle/>
-          <a:p>
-            <a:pPr algn="ctr"/>
-            <a:r>
-              <a:rPr kumimoji="1" lang="en-US" altLang="ja-JP" sz="1600" dirty="0">
-                <a:solidFill>
-                  <a:schemeClr val="tx1">
-                    <a:lumMod val="75000"/>
-                    <a:lumOff val="25000"/>
-                  </a:schemeClr>
-                </a:solidFill>
-              </a:rPr>
-              <a:t>string</a:t>
-            </a:r>
-          </a:p>
-        </p:txBody>
-      </p:sp>
-      <p:sp>
-        <p:nvSpPr>
-          <p:cNvPr id="36" name="角丸四角形 35"/>
-          <p:cNvSpPr/>
-          <p:nvPr/>
-        </p:nvSpPr>
-        <p:spPr>
-          <a:xfrm>
-            <a:off x="368094" y="5469245"/>
-            <a:ext cx="3387338" cy="368242"/>
-          </a:xfrm>
-          <a:prstGeom prst="roundRect">
-            <a:avLst/>
-          </a:prstGeom>
-          <a:gradFill>
-            <a:gsLst>
-              <a:gs pos="0">
-                <a:schemeClr val="bg1">
-                  <a:lumMod val="75000"/>
-                </a:schemeClr>
-              </a:gs>
-              <a:gs pos="100000">
-                <a:schemeClr val="bg1">
-                  <a:lumMod val="95000"/>
-                </a:schemeClr>
-              </a:gs>
-            </a:gsLst>
-          </a:gradFill>
-        </p:spPr>
-        <p:style>
-          <a:lnRef idx="1">
-            <a:schemeClr val="dk1"/>
-          </a:lnRef>
-          <a:fillRef idx="3">
-            <a:schemeClr val="dk1"/>
-          </a:fillRef>
-          <a:effectRef idx="2">
-            <a:schemeClr val="dk1"/>
-          </a:effectRef>
-          <a:fontRef idx="minor">
-            <a:schemeClr val="lt1"/>
-          </a:fontRef>
-        </p:style>
-        <p:txBody>
-          <a:bodyPr rtlCol="0" anchor="ctr"/>
-          <a:lstStyle/>
-          <a:p>
-            <a:pPr algn="ctr"/>
-            <a:r>
-              <a:rPr lang="en-US" altLang="ja-JP" sz="1600" dirty="0">
-                <a:solidFill>
-                  <a:schemeClr val="tx1">
-                    <a:lumMod val="75000"/>
-                    <a:lumOff val="25000"/>
-                  </a:schemeClr>
-                </a:solidFill>
-              </a:rPr>
-              <a:t>validator</a:t>
-            </a:r>
-            <a:endParaRPr kumimoji="1" lang="en-US" altLang="ja-JP" sz="1600" dirty="0">
-              <a:solidFill>
-                <a:schemeClr val="tx1">
-                  <a:lumMod val="75000"/>
-                  <a:lumOff val="25000"/>
-                </a:schemeClr>
-              </a:solidFill>
-            </a:endParaRPr>
-          </a:p>
-        </p:txBody>
-      </p:sp>
-      <p:sp>
-        <p:nvSpPr>
-          <p:cNvPr id="60" name="角丸四角形 59"/>
-          <p:cNvSpPr/>
-          <p:nvPr/>
-        </p:nvSpPr>
-        <p:spPr>
-          <a:xfrm>
-            <a:off x="387939" y="2593252"/>
-            <a:ext cx="3377415" cy="368242"/>
-          </a:xfrm>
-          <a:prstGeom prst="roundRect">
-            <a:avLst/>
-          </a:prstGeom>
-          <a:gradFill>
-            <a:gsLst>
-              <a:gs pos="0">
-                <a:schemeClr val="bg1">
-                  <a:lumMod val="75000"/>
-                </a:schemeClr>
-              </a:gs>
-              <a:gs pos="100000">
-                <a:schemeClr val="bg1">
-                  <a:lumMod val="95000"/>
-                </a:schemeClr>
-              </a:gs>
-            </a:gsLst>
-          </a:gradFill>
-        </p:spPr>
-        <p:style>
-          <a:lnRef idx="1">
-            <a:schemeClr val="dk1"/>
-          </a:lnRef>
-          <a:fillRef idx="3">
-            <a:schemeClr val="dk1"/>
-          </a:fillRef>
-          <a:effectRef idx="2">
-            <a:schemeClr val="dk1"/>
-          </a:effectRef>
-          <a:fontRef idx="minor">
-            <a:schemeClr val="lt1"/>
-          </a:fontRef>
-        </p:style>
-        <p:txBody>
-          <a:bodyPr rtlCol="0" anchor="ctr"/>
-          <a:lstStyle/>
-          <a:p>
-            <a:pPr algn="ctr"/>
-            <a:r>
-              <a:rPr kumimoji="1" lang="en-US" altLang="ja-JP" sz="1600" dirty="0">
-                <a:solidFill>
-                  <a:schemeClr val="tx1">
-                    <a:lumMod val="75000"/>
-                    <a:lumOff val="25000"/>
-                  </a:schemeClr>
-                </a:solidFill>
-              </a:rPr>
-              <a:t>web</a:t>
-            </a:r>
-            <a:r>
-              <a:rPr lang="en-US" altLang="ja-JP" sz="1600" dirty="0">
-                <a:solidFill>
-                  <a:schemeClr val="tx1">
-                    <a:lumMod val="75000"/>
-                    <a:lumOff val="25000"/>
-                  </a:schemeClr>
-                </a:solidFill>
-              </a:rPr>
-              <a:t>-</a:t>
-            </a:r>
-            <a:r>
-              <a:rPr lang="en-US" altLang="ja-JP" sz="1600" dirty="0" err="1">
-                <a:solidFill>
-                  <a:schemeClr val="tx1">
-                    <a:lumMod val="75000"/>
-                    <a:lumOff val="25000"/>
-                  </a:schemeClr>
-                </a:solidFill>
-              </a:rPr>
-              <a:t>jsp</a:t>
-            </a:r>
-            <a:endParaRPr kumimoji="1" lang="en-US" altLang="ja-JP" sz="1600" dirty="0">
-              <a:solidFill>
-                <a:schemeClr val="tx1">
-                  <a:lumMod val="75000"/>
-                  <a:lumOff val="25000"/>
-                </a:schemeClr>
-              </a:solidFill>
-            </a:endParaRPr>
-          </a:p>
-        </p:txBody>
-      </p:sp>
-      <p:sp>
-        <p:nvSpPr>
-          <p:cNvPr id="69" name="テキスト ボックス 68"/>
-          <p:cNvSpPr txBox="1"/>
-          <p:nvPr/>
-        </p:nvSpPr>
-        <p:spPr>
-          <a:xfrm>
-            <a:off x="7158523" y="1145849"/>
-            <a:ext cx="810851" cy="307777"/>
-          </a:xfrm>
-          <a:prstGeom prst="rect">
-            <a:avLst/>
-          </a:prstGeom>
-          <a:noFill/>
-        </p:spPr>
-        <p:txBody>
-          <a:bodyPr wrap="none" rtlCol="0">
-            <a:spAutoFit/>
-          </a:bodyPr>
-          <a:lstStyle/>
-          <a:p>
-            <a:r>
-              <a:rPr kumimoji="1" lang="en-US" altLang="ja-JP" sz="1400" dirty="0">
-                <a:solidFill>
-                  <a:schemeClr val="tx1">
-                    <a:lumMod val="50000"/>
-                    <a:lumOff val="50000"/>
-                  </a:schemeClr>
-                </a:solidFill>
-              </a:rPr>
-              <a:t>depends</a:t>
-            </a:r>
-            <a:endParaRPr kumimoji="1" lang="ja-JP" altLang="en-US" sz="1400" dirty="0">
-              <a:solidFill>
-                <a:schemeClr val="tx1">
-                  <a:lumMod val="50000"/>
-                  <a:lumOff val="50000"/>
-                </a:schemeClr>
-              </a:solidFill>
-            </a:endParaRPr>
-          </a:p>
-        </p:txBody>
-      </p:sp>
-      <p:cxnSp>
-        <p:nvCxnSpPr>
-          <p:cNvPr id="21" name="カギ線コネクタ 20"/>
-          <p:cNvCxnSpPr>
-            <a:stCxn id="47" idx="1"/>
-            <a:endCxn id="53" idx="1"/>
-          </p:cNvCxnSpPr>
-          <p:nvPr/>
-        </p:nvCxnSpPr>
-        <p:spPr>
-          <a:xfrm rot="10800000">
-            <a:off x="387940" y="2058375"/>
-            <a:ext cx="3569" cy="1437996"/>
-          </a:xfrm>
-          <a:prstGeom prst="bentConnector3">
-            <a:avLst>
-              <a:gd name="adj1" fmla="val 6505156"/>
-            </a:avLst>
-          </a:prstGeom>
-          <a:ln w="12700" cmpd="sng">
-            <a:solidFill>
-              <a:schemeClr val="tx1">
-                <a:lumMod val="50000"/>
-                <a:lumOff val="50000"/>
-              </a:schemeClr>
-            </a:solidFill>
-            <a:prstDash val="sysDash"/>
-            <a:headEnd type="none"/>
-            <a:tailEnd type="triangle"/>
-          </a:ln>
-        </p:spPr>
-        <p:style>
-          <a:lnRef idx="2">
-            <a:schemeClr val="accent1"/>
-          </a:lnRef>
-          <a:fillRef idx="0">
-            <a:schemeClr val="accent1"/>
-          </a:fillRef>
-          <a:effectRef idx="1">
-            <a:schemeClr val="accent1"/>
-          </a:effectRef>
-          <a:fontRef idx="minor">
-            <a:schemeClr val="tx1"/>
-          </a:fontRef>
-        </p:style>
-      </p:cxnSp>
-      <p:sp>
-        <p:nvSpPr>
-          <p:cNvPr id="62" name="角丸四角形 61"/>
-          <p:cNvSpPr/>
-          <p:nvPr/>
-        </p:nvSpPr>
-        <p:spPr>
-          <a:xfrm>
-            <a:off x="962795" y="-395118"/>
-            <a:ext cx="2264228" cy="368242"/>
-          </a:xfrm>
-          <a:prstGeom prst="roundRect">
-            <a:avLst/>
-          </a:prstGeom>
-          <a:gradFill>
-            <a:gsLst>
-              <a:gs pos="0">
-                <a:schemeClr val="bg1">
-                  <a:lumMod val="75000"/>
-                </a:schemeClr>
-              </a:gs>
-              <a:gs pos="100000">
-                <a:schemeClr val="bg1">
-                  <a:lumMod val="95000"/>
-                </a:schemeClr>
-              </a:gs>
-            </a:gsLst>
-          </a:gradFill>
-        </p:spPr>
-        <p:style>
-          <a:lnRef idx="1">
-            <a:schemeClr val="dk1"/>
-          </a:lnRef>
-          <a:fillRef idx="3">
-            <a:schemeClr val="dk1"/>
-          </a:fillRef>
-          <a:effectRef idx="2">
-            <a:schemeClr val="dk1"/>
-          </a:effectRef>
-          <a:fontRef idx="minor">
-            <a:schemeClr val="lt1"/>
-          </a:fontRef>
-        </p:style>
-        <p:txBody>
-          <a:bodyPr rtlCol="0" anchor="ctr"/>
-          <a:lstStyle/>
-          <a:p>
-            <a:pPr algn="ctr"/>
-            <a:r>
-              <a:rPr kumimoji="1" lang="en-US" altLang="ja-JP" sz="1600" dirty="0">
-                <a:solidFill>
-                  <a:schemeClr val="tx1">
-                    <a:lumMod val="75000"/>
-                    <a:lumOff val="25000"/>
-                  </a:schemeClr>
-                </a:solidFill>
-              </a:rPr>
-              <a:t>Common-libraries</a:t>
-            </a:r>
-          </a:p>
-        </p:txBody>
-      </p:sp>
-      <p:sp>
-        <p:nvSpPr>
-          <p:cNvPr id="63" name="角丸四角形 62"/>
-          <p:cNvSpPr/>
-          <p:nvPr/>
-        </p:nvSpPr>
-        <p:spPr>
-          <a:xfrm>
-            <a:off x="5965101" y="-395118"/>
-            <a:ext cx="2264229" cy="368242"/>
-          </a:xfrm>
-          <a:prstGeom prst="roundRect">
-            <a:avLst/>
-          </a:prstGeom>
-          <a:gradFill>
-            <a:gsLst>
-              <a:gs pos="0">
-                <a:schemeClr val="bg1">
-                  <a:lumMod val="75000"/>
-                </a:schemeClr>
-              </a:gs>
-              <a:gs pos="100000">
-                <a:schemeClr val="bg1">
-                  <a:lumMod val="95000"/>
-                </a:schemeClr>
-              </a:gs>
-            </a:gsLst>
-          </a:gradFill>
-        </p:spPr>
-        <p:style>
-          <a:lnRef idx="1">
-            <a:schemeClr val="dk1"/>
-          </a:lnRef>
-          <a:fillRef idx="3">
-            <a:schemeClr val="dk1"/>
-          </a:fillRef>
-          <a:effectRef idx="2">
-            <a:schemeClr val="dk1"/>
-          </a:effectRef>
-          <a:fontRef idx="minor">
-            <a:schemeClr val="lt1"/>
-          </a:fontRef>
-        </p:style>
-        <p:txBody>
-          <a:bodyPr rtlCol="0" anchor="ctr"/>
-          <a:lstStyle/>
-          <a:p>
-            <a:pPr algn="ctr"/>
-            <a:r>
-              <a:rPr kumimoji="1" lang="en-US" altLang="ja-JP" sz="1600" dirty="0">
-                <a:solidFill>
-                  <a:schemeClr val="tx1">
-                    <a:lumMod val="75000"/>
-                    <a:lumOff val="25000"/>
-                  </a:schemeClr>
-                </a:solidFill>
-              </a:rPr>
-              <a:t>dependencies</a:t>
-            </a:r>
-          </a:p>
-        </p:txBody>
-      </p:sp>
-      <p:sp>
-        <p:nvSpPr>
-          <p:cNvPr id="86" name="角丸四角形 85"/>
-          <p:cNvSpPr/>
-          <p:nvPr/>
-        </p:nvSpPr>
-        <p:spPr>
-          <a:xfrm>
-            <a:off x="3932190" y="-1688293"/>
-            <a:ext cx="1339676" cy="368242"/>
-          </a:xfrm>
-          <a:prstGeom prst="roundRect">
-            <a:avLst/>
-          </a:prstGeom>
-          <a:gradFill>
-            <a:gsLst>
-              <a:gs pos="0">
-                <a:schemeClr val="bg1">
-                  <a:lumMod val="75000"/>
-                </a:schemeClr>
-              </a:gs>
-              <a:gs pos="100000">
-                <a:schemeClr val="bg1">
-                  <a:lumMod val="95000"/>
-                </a:schemeClr>
-              </a:gs>
-            </a:gsLst>
-          </a:gradFill>
-        </p:spPr>
-        <p:style>
-          <a:lnRef idx="1">
-            <a:schemeClr val="dk1"/>
-          </a:lnRef>
-          <a:fillRef idx="3">
-            <a:schemeClr val="dk1"/>
-          </a:fillRef>
-          <a:effectRef idx="2">
-            <a:schemeClr val="dk1"/>
-          </a:effectRef>
-          <a:fontRef idx="minor">
-            <a:schemeClr val="lt1"/>
-          </a:fontRef>
-        </p:style>
-        <p:txBody>
-          <a:bodyPr rtlCol="0" anchor="ctr"/>
-          <a:lstStyle/>
-          <a:p>
-            <a:pPr algn="ctr"/>
-            <a:r>
-              <a:rPr kumimoji="1" lang="en-US" altLang="ja-JP" sz="1600" dirty="0">
-                <a:solidFill>
-                  <a:schemeClr val="tx1">
-                    <a:lumMod val="75000"/>
-                    <a:lumOff val="25000"/>
-                  </a:schemeClr>
-                </a:solidFill>
-              </a:rPr>
-              <a:t>parent</a:t>
-            </a:r>
-          </a:p>
-        </p:txBody>
-      </p:sp>
-      <p:sp>
-        <p:nvSpPr>
-          <p:cNvPr id="98" name="テキスト ボックス 97"/>
-          <p:cNvSpPr txBox="1"/>
-          <p:nvPr/>
-        </p:nvSpPr>
-        <p:spPr>
-          <a:xfrm>
-            <a:off x="3871688" y="-1180113"/>
-            <a:ext cx="671378" cy="307777"/>
-          </a:xfrm>
-          <a:prstGeom prst="rect">
-            <a:avLst/>
-          </a:prstGeom>
-          <a:noFill/>
-        </p:spPr>
-        <p:txBody>
-          <a:bodyPr wrap="none" rtlCol="0">
-            <a:spAutoFit/>
-          </a:bodyPr>
-          <a:lstStyle/>
-          <a:p>
-            <a:r>
-              <a:rPr kumimoji="1" lang="en-US" altLang="ja-JP" sz="1400" dirty="0">
-                <a:solidFill>
-                  <a:schemeClr val="tx1">
-                    <a:lumMod val="50000"/>
-                    <a:lumOff val="50000"/>
-                  </a:schemeClr>
-                </a:solidFill>
-              </a:rPr>
-              <a:t>parent</a:t>
-            </a:r>
-            <a:endParaRPr kumimoji="1" lang="ja-JP" altLang="en-US" sz="1400" dirty="0">
-              <a:solidFill>
-                <a:schemeClr val="tx1">
-                  <a:lumMod val="50000"/>
-                  <a:lumOff val="50000"/>
-                </a:schemeClr>
-              </a:solidFill>
-            </a:endParaRPr>
-          </a:p>
-        </p:txBody>
-      </p:sp>
-      <p:sp>
-        <p:nvSpPr>
-          <p:cNvPr id="168" name="テキスト ボックス 167"/>
-          <p:cNvSpPr txBox="1"/>
-          <p:nvPr/>
-        </p:nvSpPr>
-        <p:spPr>
-          <a:xfrm>
-            <a:off x="1160869" y="431064"/>
-            <a:ext cx="1205409" cy="307777"/>
-          </a:xfrm>
-          <a:prstGeom prst="rect">
-            <a:avLst/>
-          </a:prstGeom>
-          <a:noFill/>
-        </p:spPr>
-        <p:txBody>
-          <a:bodyPr wrap="square" rtlCol="0">
-            <a:spAutoFit/>
-          </a:bodyPr>
-          <a:lstStyle/>
-          <a:p>
-            <a:pPr algn="ctr"/>
-            <a:r>
-              <a:rPr kumimoji="1" lang="en-US" altLang="ja-JP" sz="1400" dirty="0">
-                <a:solidFill>
-                  <a:schemeClr val="tx1">
-                    <a:lumMod val="50000"/>
-                    <a:lumOff val="50000"/>
-                  </a:schemeClr>
-                </a:solidFill>
-              </a:rPr>
-              <a:t>parent</a:t>
-            </a:r>
-            <a:endParaRPr kumimoji="1" lang="ja-JP" altLang="en-US" sz="1400" dirty="0">
-              <a:solidFill>
-                <a:schemeClr val="tx1">
-                  <a:lumMod val="50000"/>
-                  <a:lumOff val="50000"/>
-                </a:schemeClr>
-              </a:solidFill>
-            </a:endParaRPr>
-          </a:p>
-        </p:txBody>
-      </p:sp>
-      <p:sp>
-        <p:nvSpPr>
-          <p:cNvPr id="215" name="角丸四角形 214"/>
-          <p:cNvSpPr/>
-          <p:nvPr/>
-        </p:nvSpPr>
-        <p:spPr>
-          <a:xfrm>
-            <a:off x="5377732" y="1155315"/>
-            <a:ext cx="3363925" cy="368242"/>
-          </a:xfrm>
-          <a:prstGeom prst="roundRect">
-            <a:avLst/>
-          </a:prstGeom>
-          <a:gradFill>
-            <a:gsLst>
-              <a:gs pos="0">
-                <a:schemeClr val="bg1">
-                  <a:lumMod val="75000"/>
-                </a:schemeClr>
-              </a:gs>
-              <a:gs pos="100000">
-                <a:schemeClr val="bg1">
-                  <a:lumMod val="95000"/>
-                </a:schemeClr>
-              </a:gs>
-            </a:gsLst>
-          </a:gradFill>
-        </p:spPr>
-        <p:style>
-          <a:lnRef idx="1">
-            <a:schemeClr val="dk1"/>
-          </a:lnRef>
-          <a:fillRef idx="3">
-            <a:schemeClr val="dk1"/>
-          </a:fillRef>
-          <a:effectRef idx="2">
-            <a:schemeClr val="dk1"/>
-          </a:effectRef>
-          <a:fontRef idx="minor">
-            <a:schemeClr val="lt1"/>
-          </a:fontRef>
-        </p:style>
-        <p:txBody>
-          <a:bodyPr rtlCol="0" anchor="ctr"/>
-          <a:lstStyle/>
-          <a:p>
-            <a:pPr algn="ctr"/>
-            <a:r>
-              <a:rPr lang="en-US" altLang="ja-JP" sz="1600" dirty="0">
-                <a:solidFill>
-                  <a:schemeClr val="tx1">
-                    <a:lumMod val="75000"/>
-                    <a:lumOff val="25000"/>
-                  </a:schemeClr>
-                </a:solidFill>
-              </a:rPr>
-              <a:t>common-dependencies</a:t>
-            </a:r>
-            <a:endParaRPr kumimoji="1" lang="en-US" altLang="ja-JP" sz="1600" dirty="0">
-              <a:solidFill>
-                <a:schemeClr val="tx1">
-                  <a:lumMod val="75000"/>
-                  <a:lumOff val="25000"/>
-                </a:schemeClr>
-              </a:solidFill>
-            </a:endParaRPr>
-          </a:p>
-        </p:txBody>
-      </p:sp>
-      <p:sp>
-        <p:nvSpPr>
-          <p:cNvPr id="216" name="角丸四角形 215"/>
-          <p:cNvSpPr/>
-          <p:nvPr/>
-        </p:nvSpPr>
-        <p:spPr>
-          <a:xfrm>
-            <a:off x="5387903" y="1867335"/>
-            <a:ext cx="3353754" cy="368242"/>
-          </a:xfrm>
-          <a:prstGeom prst="roundRect">
-            <a:avLst/>
-          </a:prstGeom>
-          <a:gradFill>
-            <a:gsLst>
-              <a:gs pos="0">
-                <a:schemeClr val="bg1">
-                  <a:lumMod val="75000"/>
-                </a:schemeClr>
-              </a:gs>
-              <a:gs pos="100000">
-                <a:schemeClr val="bg1">
-                  <a:lumMod val="95000"/>
-                </a:schemeClr>
-              </a:gs>
-            </a:gsLst>
-          </a:gradFill>
-        </p:spPr>
-        <p:style>
-          <a:lnRef idx="1">
-            <a:schemeClr val="dk1"/>
-          </a:lnRef>
-          <a:fillRef idx="3">
-            <a:schemeClr val="dk1"/>
-          </a:fillRef>
-          <a:effectRef idx="2">
-            <a:schemeClr val="dk1"/>
-          </a:effectRef>
-          <a:fontRef idx="minor">
-            <a:schemeClr val="lt1"/>
-          </a:fontRef>
-        </p:style>
-        <p:txBody>
-          <a:bodyPr rtlCol="0" anchor="ctr"/>
-          <a:lstStyle/>
-          <a:p>
-            <a:pPr algn="ctr"/>
-            <a:r>
-              <a:rPr lang="en-US" altLang="ja-JP" sz="1600" dirty="0">
-                <a:solidFill>
-                  <a:schemeClr val="tx1">
-                    <a:lumMod val="75000"/>
-                    <a:lumOff val="25000"/>
-                  </a:schemeClr>
-                </a:solidFill>
-              </a:rPr>
-              <a:t>web-dependencies</a:t>
-            </a:r>
-            <a:endParaRPr kumimoji="1" lang="en-US" altLang="ja-JP" sz="1600" dirty="0">
-              <a:solidFill>
-                <a:schemeClr val="tx1">
-                  <a:lumMod val="75000"/>
-                  <a:lumOff val="25000"/>
-                </a:schemeClr>
-              </a:solidFill>
-            </a:endParaRPr>
-          </a:p>
-        </p:txBody>
-      </p:sp>
-      <p:sp>
-        <p:nvSpPr>
-          <p:cNvPr id="68" name="角丸四角形 67"/>
-          <p:cNvSpPr/>
-          <p:nvPr/>
-        </p:nvSpPr>
-        <p:spPr>
-          <a:xfrm>
-            <a:off x="5392138" y="2601363"/>
-            <a:ext cx="3353754" cy="368242"/>
-          </a:xfrm>
-          <a:prstGeom prst="roundRect">
-            <a:avLst/>
-          </a:prstGeom>
-          <a:gradFill>
-            <a:gsLst>
-              <a:gs pos="0">
-                <a:schemeClr val="bg1">
-                  <a:lumMod val="75000"/>
-                </a:schemeClr>
-              </a:gs>
-              <a:gs pos="100000">
-                <a:schemeClr val="bg1">
-                  <a:lumMod val="95000"/>
-                </a:schemeClr>
-              </a:gs>
-            </a:gsLst>
-          </a:gradFill>
-        </p:spPr>
-        <p:style>
-          <a:lnRef idx="1">
-            <a:schemeClr val="dk1"/>
-          </a:lnRef>
-          <a:fillRef idx="3">
-            <a:schemeClr val="dk1"/>
-          </a:fillRef>
-          <a:effectRef idx="2">
-            <a:schemeClr val="dk1"/>
-          </a:effectRef>
-          <a:fontRef idx="minor">
-            <a:schemeClr val="lt1"/>
-          </a:fontRef>
-        </p:style>
-        <p:txBody>
-          <a:bodyPr rtlCol="0" anchor="ctr"/>
-          <a:lstStyle/>
-          <a:p>
-            <a:pPr algn="ctr"/>
-            <a:r>
-              <a:rPr lang="en-US" altLang="ja-JP" sz="1600" dirty="0">
-                <a:solidFill>
-                  <a:schemeClr val="tx1">
-                    <a:lumMod val="75000"/>
-                    <a:lumOff val="25000"/>
-                  </a:schemeClr>
-                </a:solidFill>
-              </a:rPr>
-              <a:t>web-</a:t>
-            </a:r>
-            <a:r>
-              <a:rPr lang="en-US" altLang="ja-JP" sz="1600" dirty="0" err="1">
-                <a:solidFill>
-                  <a:schemeClr val="tx1">
-                    <a:lumMod val="75000"/>
-                    <a:lumOff val="25000"/>
-                  </a:schemeClr>
-                </a:solidFill>
-              </a:rPr>
-              <a:t>jsp</a:t>
-            </a:r>
-            <a:r>
-              <a:rPr lang="en-US" altLang="ja-JP" sz="1600" dirty="0">
-                <a:solidFill>
-                  <a:schemeClr val="tx1">
-                    <a:lumMod val="75000"/>
-                    <a:lumOff val="25000"/>
-                  </a:schemeClr>
-                </a:solidFill>
-              </a:rPr>
-              <a:t>-dependencies</a:t>
-            </a:r>
-            <a:endParaRPr kumimoji="1" lang="en-US" altLang="ja-JP" sz="1600" dirty="0">
-              <a:solidFill>
-                <a:schemeClr val="tx1">
-                  <a:lumMod val="75000"/>
-                  <a:lumOff val="25000"/>
-                </a:schemeClr>
-              </a:solidFill>
-            </a:endParaRPr>
-          </a:p>
-        </p:txBody>
-      </p:sp>
-      <p:sp>
-        <p:nvSpPr>
-          <p:cNvPr id="71" name="角丸四角形 70"/>
-          <p:cNvSpPr/>
-          <p:nvPr/>
-        </p:nvSpPr>
-        <p:spPr>
-          <a:xfrm>
-            <a:off x="5392138" y="3312250"/>
-            <a:ext cx="3353754" cy="368242"/>
-          </a:xfrm>
-          <a:prstGeom prst="roundRect">
-            <a:avLst/>
-          </a:prstGeom>
-          <a:gradFill>
-            <a:gsLst>
-              <a:gs pos="0">
-                <a:schemeClr val="bg1">
-                  <a:lumMod val="75000"/>
-                </a:schemeClr>
-              </a:gs>
-              <a:gs pos="100000">
-                <a:schemeClr val="bg1">
-                  <a:lumMod val="95000"/>
-                </a:schemeClr>
-              </a:gs>
-            </a:gsLst>
-          </a:gradFill>
-        </p:spPr>
-        <p:style>
-          <a:lnRef idx="1">
-            <a:schemeClr val="dk1"/>
-          </a:lnRef>
-          <a:fillRef idx="3">
-            <a:schemeClr val="dk1"/>
-          </a:fillRef>
-          <a:effectRef idx="2">
-            <a:schemeClr val="dk1"/>
-          </a:effectRef>
-          <a:fontRef idx="minor">
-            <a:schemeClr val="lt1"/>
-          </a:fontRef>
-        </p:style>
-        <p:txBody>
-          <a:bodyPr rtlCol="0" anchor="ctr"/>
-          <a:lstStyle/>
-          <a:p>
-            <a:pPr algn="ctr"/>
-            <a:r>
-              <a:rPr lang="en-US" altLang="ja-JP" sz="1600" dirty="0">
-                <a:solidFill>
-                  <a:schemeClr val="tx1">
-                    <a:lumMod val="75000"/>
-                    <a:lumOff val="25000"/>
-                  </a:schemeClr>
-                </a:solidFill>
-              </a:rPr>
-              <a:t>security-web-dependencies</a:t>
-            </a:r>
-            <a:endParaRPr kumimoji="1" lang="en-US" altLang="ja-JP" sz="1600" dirty="0">
-              <a:solidFill>
-                <a:schemeClr val="tx1">
-                  <a:lumMod val="75000"/>
-                  <a:lumOff val="25000"/>
-                </a:schemeClr>
-              </a:solidFill>
-            </a:endParaRPr>
-          </a:p>
-        </p:txBody>
-      </p:sp>
-      <p:sp>
-        <p:nvSpPr>
-          <p:cNvPr id="72" name="角丸四角形 71"/>
-          <p:cNvSpPr/>
-          <p:nvPr/>
-        </p:nvSpPr>
-        <p:spPr>
-          <a:xfrm>
-            <a:off x="6608" y="-713377"/>
-            <a:ext cx="9189467" cy="998716"/>
-          </a:xfrm>
-          <a:prstGeom prst="roundRect">
-            <a:avLst/>
-          </a:prstGeom>
-          <a:noFill/>
-          <a:ln>
-            <a:solidFill>
-              <a:schemeClr val="tx1">
-                <a:lumMod val="50000"/>
-                <a:lumOff val="50000"/>
-              </a:schemeClr>
-            </a:solidFill>
-          </a:ln>
-        </p:spPr>
-        <p:style>
-          <a:lnRef idx="2">
-            <a:schemeClr val="accent1"/>
-          </a:lnRef>
-          <a:fillRef idx="1">
-            <a:schemeClr val="lt1"/>
-          </a:fillRef>
-          <a:effectRef idx="0">
-            <a:schemeClr val="accent1"/>
-          </a:effectRef>
-          <a:fontRef idx="minor">
-            <a:schemeClr val="dk1"/>
-          </a:fontRef>
-        </p:style>
-        <p:txBody>
-          <a:bodyPr rtlCol="0" anchor="t"/>
-          <a:lstStyle/>
-          <a:p>
-            <a:pPr algn="ctr"/>
-            <a:endParaRPr kumimoji="1" lang="ja-JP" altLang="en-US" sz="2000" b="1" dirty="0">
-              <a:solidFill>
-                <a:schemeClr val="tx1">
-                  <a:lumMod val="65000"/>
-                  <a:lumOff val="35000"/>
-                </a:schemeClr>
-              </a:solidFill>
-            </a:endParaRPr>
-          </a:p>
-        </p:txBody>
-      </p:sp>
-      <p:cxnSp>
-        <p:nvCxnSpPr>
-          <p:cNvPr id="97" name="直線コネクタ 96"/>
-          <p:cNvCxnSpPr>
-            <a:stCxn id="86" idx="2"/>
-            <a:endCxn id="72" idx="0"/>
-          </p:cNvCxnSpPr>
-          <p:nvPr/>
-        </p:nvCxnSpPr>
-        <p:spPr>
-          <a:xfrm flipH="1">
-            <a:off x="4601342" y="-1320051"/>
-            <a:ext cx="686" cy="606674"/>
-          </a:xfrm>
-          <a:prstGeom prst="line">
-            <a:avLst/>
-          </a:prstGeom>
-          <a:ln w="12700" cmpd="sng">
-            <a:solidFill>
-              <a:schemeClr val="tx1">
-                <a:lumMod val="50000"/>
-                <a:lumOff val="50000"/>
-              </a:schemeClr>
-            </a:solidFill>
-            <a:prstDash val="solid"/>
-            <a:headEnd type="none"/>
-            <a:tailEnd type="none"/>
-          </a:ln>
-        </p:spPr>
-        <p:style>
-          <a:lnRef idx="2">
-            <a:schemeClr val="accent1"/>
-          </a:lnRef>
-          <a:fillRef idx="0">
-            <a:schemeClr val="accent1"/>
-          </a:fillRef>
-          <a:effectRef idx="1">
-            <a:schemeClr val="accent1"/>
-          </a:effectRef>
-          <a:fontRef idx="minor">
-            <a:schemeClr val="tx1"/>
-          </a:fontRef>
-        </p:style>
-      </p:cxnSp>
-      <p:sp>
-        <p:nvSpPr>
-          <p:cNvPr id="109" name="角丸四角形 108"/>
-          <p:cNvSpPr/>
-          <p:nvPr/>
-        </p:nvSpPr>
-        <p:spPr>
-          <a:xfrm>
-            <a:off x="6609" y="880613"/>
-            <a:ext cx="4176141" cy="6595952"/>
-          </a:xfrm>
-          <a:prstGeom prst="roundRect">
-            <a:avLst>
-              <a:gd name="adj" fmla="val 4846"/>
-            </a:avLst>
-          </a:prstGeom>
-          <a:noFill/>
-          <a:ln>
-            <a:solidFill>
-              <a:schemeClr val="tx1">
-                <a:lumMod val="50000"/>
-                <a:lumOff val="50000"/>
-              </a:schemeClr>
-            </a:solidFill>
-          </a:ln>
-        </p:spPr>
-        <p:style>
-          <a:lnRef idx="2">
-            <a:schemeClr val="accent1"/>
-          </a:lnRef>
-          <a:fillRef idx="1">
-            <a:schemeClr val="lt1"/>
-          </a:fillRef>
-          <a:effectRef idx="0">
-            <a:schemeClr val="accent1"/>
-          </a:effectRef>
-          <a:fontRef idx="minor">
-            <a:schemeClr val="dk1"/>
-          </a:fontRef>
-        </p:style>
-        <p:txBody>
-          <a:bodyPr rtlCol="0" anchor="t"/>
-          <a:lstStyle/>
-          <a:p>
-            <a:pPr algn="ctr"/>
-            <a:endParaRPr kumimoji="1" lang="ja-JP" altLang="en-US" sz="2000" b="1" dirty="0">
-              <a:solidFill>
-                <a:schemeClr val="tx1">
-                  <a:lumMod val="65000"/>
-                  <a:lumOff val="35000"/>
-                </a:schemeClr>
-              </a:solidFill>
-            </a:endParaRPr>
-          </a:p>
-        </p:txBody>
-      </p:sp>
-      <p:sp>
-        <p:nvSpPr>
-          <p:cNvPr id="110" name="角丸四角形 109"/>
-          <p:cNvSpPr/>
-          <p:nvPr/>
-        </p:nvSpPr>
-        <p:spPr>
-          <a:xfrm>
-            <a:off x="4995445" y="880613"/>
-            <a:ext cx="4200631" cy="6595952"/>
-          </a:xfrm>
-          <a:prstGeom prst="roundRect">
-            <a:avLst>
-              <a:gd name="adj" fmla="val 4846"/>
-            </a:avLst>
-          </a:prstGeom>
-          <a:noFill/>
-          <a:ln>
-            <a:solidFill>
-              <a:schemeClr val="tx1">
-                <a:lumMod val="50000"/>
-                <a:lumOff val="50000"/>
-              </a:schemeClr>
-            </a:solidFill>
-          </a:ln>
-        </p:spPr>
-        <p:style>
-          <a:lnRef idx="2">
-            <a:schemeClr val="accent1"/>
-          </a:lnRef>
-          <a:fillRef idx="1">
-            <a:schemeClr val="lt1"/>
-          </a:fillRef>
-          <a:effectRef idx="0">
-            <a:schemeClr val="accent1"/>
-          </a:effectRef>
-          <a:fontRef idx="minor">
-            <a:schemeClr val="dk1"/>
-          </a:fontRef>
-        </p:style>
-        <p:txBody>
-          <a:bodyPr rtlCol="0" anchor="t"/>
-          <a:lstStyle/>
-          <a:p>
-            <a:pPr algn="ctr"/>
-            <a:endParaRPr kumimoji="1" lang="ja-JP" altLang="en-US" sz="2000" b="1" dirty="0">
-              <a:solidFill>
-                <a:schemeClr val="tx1">
-                  <a:lumMod val="65000"/>
-                  <a:lumOff val="35000"/>
-                </a:schemeClr>
-              </a:solidFill>
-            </a:endParaRPr>
-          </a:p>
-        </p:txBody>
-      </p:sp>
-      <p:cxnSp>
-        <p:nvCxnSpPr>
-          <p:cNvPr id="112" name="直線コネクタ 111"/>
-          <p:cNvCxnSpPr>
-            <a:cxnSpLocks/>
-            <a:stCxn id="62" idx="2"/>
-            <a:endCxn id="109" idx="0"/>
-          </p:cNvCxnSpPr>
-          <p:nvPr/>
-        </p:nvCxnSpPr>
-        <p:spPr>
-          <a:xfrm flipH="1">
-            <a:off x="2094680" y="-26876"/>
-            <a:ext cx="229" cy="907489"/>
-          </a:xfrm>
-          <a:prstGeom prst="line">
-            <a:avLst/>
-          </a:prstGeom>
-          <a:ln w="12700" cmpd="sng">
-            <a:solidFill>
-              <a:schemeClr val="tx1">
-                <a:lumMod val="50000"/>
-                <a:lumOff val="50000"/>
-              </a:schemeClr>
-            </a:solidFill>
-            <a:prstDash val="solid"/>
-            <a:headEnd type="none"/>
-            <a:tailEnd type="none"/>
-          </a:ln>
-        </p:spPr>
-        <p:style>
-          <a:lnRef idx="2">
-            <a:schemeClr val="accent1"/>
-          </a:lnRef>
-          <a:fillRef idx="0">
-            <a:schemeClr val="accent1"/>
-          </a:fillRef>
-          <a:effectRef idx="1">
-            <a:schemeClr val="accent1"/>
-          </a:effectRef>
-          <a:fontRef idx="minor">
-            <a:schemeClr val="tx1"/>
-          </a:fontRef>
-        </p:style>
-      </p:cxnSp>
-      <p:cxnSp>
-        <p:nvCxnSpPr>
-          <p:cNvPr id="113" name="直線コネクタ 112"/>
-          <p:cNvCxnSpPr>
-            <a:cxnSpLocks/>
-            <a:stCxn id="63" idx="2"/>
-            <a:endCxn id="110" idx="0"/>
-          </p:cNvCxnSpPr>
-          <p:nvPr/>
-        </p:nvCxnSpPr>
-        <p:spPr>
-          <a:xfrm flipH="1">
-            <a:off x="7095761" y="-26876"/>
-            <a:ext cx="1455" cy="907489"/>
-          </a:xfrm>
-          <a:prstGeom prst="line">
-            <a:avLst/>
-          </a:prstGeom>
-          <a:ln w="12700" cmpd="sng">
-            <a:solidFill>
-              <a:schemeClr val="tx1">
-                <a:lumMod val="50000"/>
-                <a:lumOff val="50000"/>
-              </a:schemeClr>
-            </a:solidFill>
-            <a:prstDash val="solid"/>
-            <a:headEnd type="none"/>
-            <a:tailEnd type="none"/>
-          </a:ln>
-        </p:spPr>
-        <p:style>
-          <a:lnRef idx="2">
-            <a:schemeClr val="accent1"/>
-          </a:lnRef>
-          <a:fillRef idx="0">
-            <a:schemeClr val="accent1"/>
-          </a:fillRef>
-          <a:effectRef idx="1">
-            <a:schemeClr val="accent1"/>
-          </a:effectRef>
-          <a:fontRef idx="minor">
-            <a:schemeClr val="tx1"/>
-          </a:fontRef>
-        </p:style>
-      </p:cxnSp>
-      <p:sp>
-        <p:nvSpPr>
-          <p:cNvPr id="117" name="テキスト ボックス 116"/>
-          <p:cNvSpPr txBox="1"/>
-          <p:nvPr/>
-        </p:nvSpPr>
-        <p:spPr>
-          <a:xfrm>
-            <a:off x="6147599" y="431064"/>
-            <a:ext cx="1205409" cy="307777"/>
-          </a:xfrm>
-          <a:prstGeom prst="rect">
-            <a:avLst/>
-          </a:prstGeom>
-          <a:noFill/>
-        </p:spPr>
-        <p:txBody>
-          <a:bodyPr wrap="square" rtlCol="0">
-            <a:spAutoFit/>
-          </a:bodyPr>
-          <a:lstStyle/>
-          <a:p>
-            <a:pPr algn="ctr"/>
-            <a:r>
-              <a:rPr kumimoji="1" lang="en-US" altLang="ja-JP" sz="1400" dirty="0">
-                <a:solidFill>
-                  <a:schemeClr val="tx1">
-                    <a:lumMod val="50000"/>
-                    <a:lumOff val="50000"/>
-                  </a:schemeClr>
-                </a:solidFill>
-              </a:rPr>
-              <a:t>parent</a:t>
-            </a:r>
-            <a:endParaRPr kumimoji="1" lang="ja-JP" altLang="en-US" sz="1400" dirty="0">
-              <a:solidFill>
-                <a:schemeClr val="tx1">
-                  <a:lumMod val="50000"/>
-                  <a:lumOff val="50000"/>
-                </a:schemeClr>
-              </a:solidFill>
-            </a:endParaRPr>
-          </a:p>
-        </p:txBody>
-      </p:sp>
-      <p:cxnSp>
-        <p:nvCxnSpPr>
-          <p:cNvPr id="133" name="カギ線コネクタ 125"/>
-          <p:cNvCxnSpPr>
-            <a:stCxn id="215" idx="1"/>
-            <a:endCxn id="52" idx="3"/>
-          </p:cNvCxnSpPr>
-          <p:nvPr/>
-        </p:nvCxnSpPr>
-        <p:spPr>
-          <a:xfrm flipH="1" flipV="1">
-            <a:off x="3765354" y="1339377"/>
-            <a:ext cx="1612378" cy="59"/>
-          </a:xfrm>
-          <a:prstGeom prst="straightConnector1">
-            <a:avLst/>
-          </a:prstGeom>
-          <a:ln w="12700" cmpd="sng">
-            <a:solidFill>
-              <a:schemeClr val="tx1">
-                <a:lumMod val="50000"/>
-                <a:lumOff val="50000"/>
-              </a:schemeClr>
-            </a:solidFill>
-            <a:prstDash val="sysDash"/>
-            <a:headEnd type="none"/>
-            <a:tailEnd type="triangle"/>
-          </a:ln>
-        </p:spPr>
-        <p:style>
-          <a:lnRef idx="2">
-            <a:schemeClr val="accent1"/>
-          </a:lnRef>
-          <a:fillRef idx="0">
-            <a:schemeClr val="accent1"/>
-          </a:fillRef>
-          <a:effectRef idx="1">
-            <a:schemeClr val="accent1"/>
-          </a:effectRef>
-          <a:fontRef idx="minor">
-            <a:schemeClr val="tx1"/>
-          </a:fontRef>
-        </p:style>
-      </p:cxnSp>
-      <p:cxnSp>
-        <p:nvCxnSpPr>
-          <p:cNvPr id="136" name="カギ線コネクタ 125"/>
-          <p:cNvCxnSpPr>
-            <a:stCxn id="216" idx="1"/>
-            <a:endCxn id="53" idx="3"/>
-          </p:cNvCxnSpPr>
-          <p:nvPr/>
-        </p:nvCxnSpPr>
-        <p:spPr>
-          <a:xfrm flipH="1">
-            <a:off x="3765354" y="2051456"/>
-            <a:ext cx="1622549" cy="6919"/>
-          </a:xfrm>
-          <a:prstGeom prst="straightConnector1">
-            <a:avLst/>
-          </a:prstGeom>
-          <a:ln w="12700" cmpd="sng">
-            <a:solidFill>
-              <a:schemeClr val="tx1">
-                <a:lumMod val="50000"/>
-                <a:lumOff val="50000"/>
-              </a:schemeClr>
-            </a:solidFill>
-            <a:prstDash val="sysDash"/>
-            <a:headEnd type="none"/>
-            <a:tailEnd type="triangle"/>
-          </a:ln>
-        </p:spPr>
-        <p:style>
-          <a:lnRef idx="2">
-            <a:schemeClr val="accent1"/>
-          </a:lnRef>
-          <a:fillRef idx="0">
-            <a:schemeClr val="accent1"/>
-          </a:fillRef>
-          <a:effectRef idx="1">
-            <a:schemeClr val="accent1"/>
-          </a:effectRef>
-          <a:fontRef idx="minor">
-            <a:schemeClr val="tx1"/>
-          </a:fontRef>
-        </p:style>
-      </p:cxnSp>
-      <p:cxnSp>
-        <p:nvCxnSpPr>
-          <p:cNvPr id="140" name="カギ線コネクタ 125"/>
-          <p:cNvCxnSpPr>
-            <a:stCxn id="68" idx="1"/>
-            <a:endCxn id="60" idx="3"/>
-          </p:cNvCxnSpPr>
-          <p:nvPr/>
-        </p:nvCxnSpPr>
-        <p:spPr>
-          <a:xfrm flipH="1" flipV="1">
-            <a:off x="3765354" y="2777373"/>
-            <a:ext cx="1626784" cy="8111"/>
-          </a:xfrm>
-          <a:prstGeom prst="straightConnector1">
-            <a:avLst/>
-          </a:prstGeom>
-          <a:ln w="12700" cmpd="sng">
-            <a:solidFill>
-              <a:schemeClr val="tx1">
-                <a:lumMod val="50000"/>
-                <a:lumOff val="50000"/>
-              </a:schemeClr>
-            </a:solidFill>
-            <a:prstDash val="sysDash"/>
-            <a:headEnd type="none"/>
-            <a:tailEnd type="triangle"/>
-          </a:ln>
-        </p:spPr>
-        <p:style>
-          <a:lnRef idx="2">
-            <a:schemeClr val="accent1"/>
-          </a:lnRef>
-          <a:fillRef idx="0">
-            <a:schemeClr val="accent1"/>
-          </a:fillRef>
-          <a:effectRef idx="1">
-            <a:schemeClr val="accent1"/>
-          </a:effectRef>
-          <a:fontRef idx="minor">
-            <a:schemeClr val="tx1"/>
-          </a:fontRef>
-        </p:style>
-      </p:cxnSp>
-      <p:cxnSp>
-        <p:nvCxnSpPr>
-          <p:cNvPr id="143" name="カギ線コネクタ 125"/>
-          <p:cNvCxnSpPr>
-            <a:stCxn id="71" idx="1"/>
-            <a:endCxn id="47" idx="3"/>
-          </p:cNvCxnSpPr>
-          <p:nvPr/>
-        </p:nvCxnSpPr>
-        <p:spPr>
-          <a:xfrm flipH="1">
-            <a:off x="3755432" y="3496371"/>
-            <a:ext cx="1636706" cy="0"/>
-          </a:xfrm>
-          <a:prstGeom prst="straightConnector1">
-            <a:avLst/>
-          </a:prstGeom>
-          <a:ln w="12700" cmpd="sng">
-            <a:solidFill>
-              <a:schemeClr val="tx1">
-                <a:lumMod val="50000"/>
-                <a:lumOff val="50000"/>
-              </a:schemeClr>
-            </a:solidFill>
-            <a:prstDash val="sysDash"/>
-            <a:headEnd type="none"/>
-            <a:tailEnd type="triangle"/>
-          </a:ln>
-        </p:spPr>
-        <p:style>
-          <a:lnRef idx="2">
-            <a:schemeClr val="accent1"/>
-          </a:lnRef>
-          <a:fillRef idx="0">
-            <a:schemeClr val="accent1"/>
-          </a:fillRef>
-          <a:effectRef idx="1">
-            <a:schemeClr val="accent1"/>
-          </a:effectRef>
-          <a:fontRef idx="minor">
-            <a:schemeClr val="tx1"/>
-          </a:fontRef>
-        </p:style>
-      </p:cxnSp>
-      <p:sp>
-        <p:nvSpPr>
-          <p:cNvPr id="157" name="テキスト ボックス 156"/>
-          <p:cNvSpPr txBox="1"/>
-          <p:nvPr/>
-        </p:nvSpPr>
-        <p:spPr>
-          <a:xfrm>
-            <a:off x="4182751" y="1387669"/>
-            <a:ext cx="810851" cy="307777"/>
-          </a:xfrm>
-          <a:prstGeom prst="rect">
-            <a:avLst/>
-          </a:prstGeom>
-          <a:noFill/>
-        </p:spPr>
-        <p:txBody>
-          <a:bodyPr wrap="none" rtlCol="0">
-            <a:spAutoFit/>
-          </a:bodyPr>
-          <a:lstStyle/>
-          <a:p>
-            <a:r>
-              <a:rPr kumimoji="1" lang="en-US" altLang="ja-JP" sz="1400" dirty="0">
-                <a:solidFill>
-                  <a:schemeClr val="tx1">
-                    <a:lumMod val="50000"/>
-                    <a:lumOff val="50000"/>
-                  </a:schemeClr>
-                </a:solidFill>
-              </a:rPr>
-              <a:t>depends</a:t>
-            </a:r>
-            <a:endParaRPr kumimoji="1" lang="ja-JP" altLang="en-US" sz="1400" dirty="0">
-              <a:solidFill>
-                <a:schemeClr val="tx1">
-                  <a:lumMod val="50000"/>
-                  <a:lumOff val="50000"/>
-                </a:schemeClr>
-              </a:solidFill>
-            </a:endParaRPr>
-          </a:p>
-        </p:txBody>
-      </p:sp>
-      <p:sp>
-        <p:nvSpPr>
-          <p:cNvPr id="158" name="テキスト ボックス 157"/>
-          <p:cNvSpPr txBox="1"/>
-          <p:nvPr/>
-        </p:nvSpPr>
-        <p:spPr>
-          <a:xfrm>
-            <a:off x="4195916" y="2072205"/>
-            <a:ext cx="810851" cy="307777"/>
-          </a:xfrm>
-          <a:prstGeom prst="rect">
-            <a:avLst/>
-          </a:prstGeom>
-          <a:noFill/>
-        </p:spPr>
-        <p:txBody>
-          <a:bodyPr wrap="none" rtlCol="0">
-            <a:spAutoFit/>
-          </a:bodyPr>
-          <a:lstStyle/>
-          <a:p>
-            <a:r>
-              <a:rPr kumimoji="1" lang="en-US" altLang="ja-JP" sz="1400" dirty="0">
-                <a:solidFill>
-                  <a:schemeClr val="tx1">
-                    <a:lumMod val="50000"/>
-                    <a:lumOff val="50000"/>
-                  </a:schemeClr>
-                </a:solidFill>
-              </a:rPr>
-              <a:t>depends</a:t>
-            </a:r>
-            <a:endParaRPr kumimoji="1" lang="ja-JP" altLang="en-US" sz="1400" dirty="0">
-              <a:solidFill>
-                <a:schemeClr val="tx1">
-                  <a:lumMod val="50000"/>
-                  <a:lumOff val="50000"/>
-                </a:schemeClr>
-              </a:solidFill>
-            </a:endParaRPr>
-          </a:p>
-        </p:txBody>
-      </p:sp>
-      <p:sp>
-        <p:nvSpPr>
-          <p:cNvPr id="159" name="テキスト ボックス 158"/>
-          <p:cNvSpPr txBox="1"/>
-          <p:nvPr/>
-        </p:nvSpPr>
-        <p:spPr>
-          <a:xfrm>
-            <a:off x="4182751" y="2802810"/>
-            <a:ext cx="810851" cy="307777"/>
-          </a:xfrm>
-          <a:prstGeom prst="rect">
-            <a:avLst/>
-          </a:prstGeom>
-          <a:noFill/>
-        </p:spPr>
-        <p:txBody>
-          <a:bodyPr wrap="none" rtlCol="0">
-            <a:spAutoFit/>
-          </a:bodyPr>
-          <a:lstStyle/>
-          <a:p>
-            <a:r>
-              <a:rPr kumimoji="1" lang="en-US" altLang="ja-JP" sz="1400" dirty="0">
-                <a:solidFill>
-                  <a:schemeClr val="tx1">
-                    <a:lumMod val="50000"/>
-                    <a:lumOff val="50000"/>
-                  </a:schemeClr>
-                </a:solidFill>
-              </a:rPr>
-              <a:t>depends</a:t>
-            </a:r>
-            <a:endParaRPr kumimoji="1" lang="ja-JP" altLang="en-US" sz="1400" dirty="0">
-              <a:solidFill>
-                <a:schemeClr val="tx1">
-                  <a:lumMod val="50000"/>
-                  <a:lumOff val="50000"/>
-                </a:schemeClr>
-              </a:solidFill>
-            </a:endParaRPr>
-          </a:p>
-        </p:txBody>
-      </p:sp>
-      <p:sp>
-        <p:nvSpPr>
-          <p:cNvPr id="160" name="テキスト ボックス 159"/>
-          <p:cNvSpPr txBox="1"/>
-          <p:nvPr/>
-        </p:nvSpPr>
-        <p:spPr>
-          <a:xfrm>
-            <a:off x="4182751" y="3529060"/>
-            <a:ext cx="810851" cy="307777"/>
-          </a:xfrm>
-          <a:prstGeom prst="rect">
-            <a:avLst/>
-          </a:prstGeom>
-          <a:noFill/>
-        </p:spPr>
-        <p:txBody>
-          <a:bodyPr wrap="none" rtlCol="0">
-            <a:spAutoFit/>
-          </a:bodyPr>
-          <a:lstStyle/>
-          <a:p>
-            <a:r>
-              <a:rPr kumimoji="1" lang="en-US" altLang="ja-JP" sz="1400" dirty="0">
-                <a:solidFill>
-                  <a:schemeClr val="tx1">
-                    <a:lumMod val="50000"/>
-                    <a:lumOff val="50000"/>
-                  </a:schemeClr>
-                </a:solidFill>
-              </a:rPr>
-              <a:t>depends</a:t>
-            </a:r>
-            <a:endParaRPr kumimoji="1" lang="ja-JP" altLang="en-US" sz="1400" dirty="0">
-              <a:solidFill>
-                <a:schemeClr val="tx1">
-                  <a:lumMod val="50000"/>
-                  <a:lumOff val="50000"/>
-                </a:schemeClr>
-              </a:solidFill>
-            </a:endParaRPr>
-          </a:p>
-        </p:txBody>
-      </p:sp>
-      <p:cxnSp>
-        <p:nvCxnSpPr>
-          <p:cNvPr id="170" name="カギ線コネクタ 169"/>
-          <p:cNvCxnSpPr>
-            <a:cxnSpLocks/>
-            <a:stCxn id="68" idx="3"/>
-            <a:endCxn id="215" idx="3"/>
-          </p:cNvCxnSpPr>
-          <p:nvPr/>
-        </p:nvCxnSpPr>
-        <p:spPr>
-          <a:xfrm flipH="1" flipV="1">
-            <a:off x="8741657" y="1339436"/>
-            <a:ext cx="4235" cy="1446048"/>
-          </a:xfrm>
-          <a:prstGeom prst="bentConnector3">
-            <a:avLst>
-              <a:gd name="adj1" fmla="val -5397875"/>
-            </a:avLst>
-          </a:prstGeom>
-          <a:ln w="12700" cmpd="sng">
-            <a:solidFill>
-              <a:schemeClr val="tx1">
-                <a:lumMod val="50000"/>
-                <a:lumOff val="50000"/>
-              </a:schemeClr>
-            </a:solidFill>
-            <a:prstDash val="sysDash"/>
-            <a:headEnd type="none"/>
-            <a:tailEnd type="triangle"/>
-          </a:ln>
-        </p:spPr>
-        <p:style>
-          <a:lnRef idx="2">
-            <a:schemeClr val="accent1"/>
-          </a:lnRef>
-          <a:fillRef idx="0">
-            <a:schemeClr val="accent1"/>
-          </a:fillRef>
-          <a:effectRef idx="1">
-            <a:schemeClr val="accent1"/>
-          </a:effectRef>
-          <a:fontRef idx="minor">
-            <a:schemeClr val="tx1"/>
-          </a:fontRef>
-        </p:style>
-      </p:cxnSp>
-      <p:sp>
-        <p:nvSpPr>
-          <p:cNvPr id="171" name="テキスト ボックス 170"/>
-          <p:cNvSpPr txBox="1"/>
-          <p:nvPr/>
-        </p:nvSpPr>
-        <p:spPr>
-          <a:xfrm>
-            <a:off x="8229330" y="2307583"/>
-            <a:ext cx="810851" cy="307777"/>
-          </a:xfrm>
-          <a:prstGeom prst="rect">
-            <a:avLst/>
-          </a:prstGeom>
-          <a:noFill/>
-        </p:spPr>
-        <p:txBody>
-          <a:bodyPr wrap="none" rtlCol="0">
-            <a:spAutoFit/>
-          </a:bodyPr>
-          <a:lstStyle/>
-          <a:p>
-            <a:r>
-              <a:rPr kumimoji="1" lang="en-US" altLang="ja-JP" sz="1400" dirty="0">
-                <a:solidFill>
-                  <a:schemeClr val="tx1">
-                    <a:lumMod val="50000"/>
-                    <a:lumOff val="50000"/>
-                  </a:schemeClr>
-                </a:solidFill>
-              </a:rPr>
-              <a:t>depends</a:t>
-            </a:r>
-            <a:endParaRPr kumimoji="1" lang="ja-JP" altLang="en-US" sz="1400" dirty="0">
-              <a:solidFill>
-                <a:schemeClr val="tx1">
-                  <a:lumMod val="50000"/>
-                  <a:lumOff val="50000"/>
-                </a:schemeClr>
-              </a:solidFill>
-            </a:endParaRPr>
-          </a:p>
-        </p:txBody>
-      </p:sp>
-      <p:cxnSp>
-        <p:nvCxnSpPr>
-          <p:cNvPr id="2" name="直線コネクタ 2">
-            <a:extLst>
-              <a:ext uri="{FF2B5EF4-FFF2-40B4-BE49-F238E27FC236}">
-                <a16:creationId xmlns:a16="http://schemas.microsoft.com/office/drawing/2014/main" id="{987413A1-8053-426A-3FC7-8E2DDBBA10A1}"/>
-              </a:ext>
-            </a:extLst>
-          </p:cNvPr>
-          <p:cNvCxnSpPr>
-            <a:cxnSpLocks/>
-            <a:stCxn id="53" idx="0"/>
-            <a:endCxn id="52" idx="2"/>
-          </p:cNvCxnSpPr>
-          <p:nvPr/>
-        </p:nvCxnSpPr>
-        <p:spPr>
-          <a:xfrm flipH="1" flipV="1">
-            <a:off x="2071685" y="1523498"/>
-            <a:ext cx="4962" cy="350756"/>
-          </a:xfrm>
-          <a:prstGeom prst="straightConnector1">
-            <a:avLst/>
-          </a:prstGeom>
-          <a:ln w="12700" cmpd="sng">
-            <a:solidFill>
-              <a:schemeClr val="tx1">
-                <a:lumMod val="50000"/>
-                <a:lumOff val="50000"/>
-              </a:schemeClr>
-            </a:solidFill>
-            <a:prstDash val="sysDash"/>
-            <a:headEnd type="none"/>
-            <a:tailEnd type="arrow"/>
-          </a:ln>
-        </p:spPr>
-        <p:style>
-          <a:lnRef idx="2">
-            <a:schemeClr val="accent1"/>
-          </a:lnRef>
-          <a:fillRef idx="0">
-            <a:schemeClr val="accent1"/>
-          </a:fillRef>
-          <a:effectRef idx="1">
-            <a:schemeClr val="accent1"/>
-          </a:effectRef>
-          <a:fontRef idx="minor">
-            <a:schemeClr val="tx1"/>
-          </a:fontRef>
-        </p:style>
-      </p:cxnSp>
-      <p:sp>
-        <p:nvSpPr>
-          <p:cNvPr id="5" name="テキスト ボックス 4">
-            <a:extLst>
-              <a:ext uri="{FF2B5EF4-FFF2-40B4-BE49-F238E27FC236}">
-                <a16:creationId xmlns:a16="http://schemas.microsoft.com/office/drawing/2014/main" id="{9033D84D-CCC4-0165-523B-017D27A99333}"/>
-              </a:ext>
-            </a:extLst>
-          </p:cNvPr>
-          <p:cNvSpPr txBox="1"/>
-          <p:nvPr/>
-        </p:nvSpPr>
-        <p:spPr>
-          <a:xfrm>
-            <a:off x="2170906" y="1571966"/>
-            <a:ext cx="810851" cy="307777"/>
-          </a:xfrm>
-          <a:prstGeom prst="rect">
-            <a:avLst/>
-          </a:prstGeom>
-          <a:noFill/>
-        </p:spPr>
-        <p:txBody>
-          <a:bodyPr wrap="none" rtlCol="0">
-            <a:spAutoFit/>
-          </a:bodyPr>
-          <a:lstStyle/>
-          <a:p>
-            <a:r>
-              <a:rPr kumimoji="1" lang="en-US" altLang="ja-JP" sz="1400" dirty="0">
-                <a:solidFill>
-                  <a:schemeClr val="tx1">
-                    <a:lumMod val="50000"/>
-                    <a:lumOff val="50000"/>
-                  </a:schemeClr>
-                </a:solidFill>
-              </a:rPr>
-              <a:t>depends</a:t>
-            </a:r>
-            <a:endParaRPr kumimoji="1" lang="ja-JP" altLang="en-US" sz="1400" dirty="0">
-              <a:solidFill>
-                <a:schemeClr val="tx1">
-                  <a:lumMod val="50000"/>
-                  <a:lumOff val="50000"/>
-                </a:schemeClr>
-              </a:solidFill>
-            </a:endParaRPr>
-          </a:p>
-        </p:txBody>
-      </p:sp>
-      <p:cxnSp>
-        <p:nvCxnSpPr>
-          <p:cNvPr id="6" name="直線コネクタ 2">
-            <a:extLst>
-              <a:ext uri="{FF2B5EF4-FFF2-40B4-BE49-F238E27FC236}">
-                <a16:creationId xmlns:a16="http://schemas.microsoft.com/office/drawing/2014/main" id="{9FFAFB51-503E-BCF5-C55F-22611E99C198}"/>
-              </a:ext>
-            </a:extLst>
-          </p:cNvPr>
-          <p:cNvCxnSpPr>
-            <a:cxnSpLocks/>
-            <a:stCxn id="216" idx="0"/>
-            <a:endCxn id="215" idx="2"/>
-          </p:cNvCxnSpPr>
-          <p:nvPr/>
-        </p:nvCxnSpPr>
-        <p:spPr>
-          <a:xfrm flipH="1" flipV="1">
-            <a:off x="7059695" y="1523557"/>
-            <a:ext cx="5085" cy="343778"/>
-          </a:xfrm>
-          <a:prstGeom prst="straightConnector1">
-            <a:avLst/>
-          </a:prstGeom>
-          <a:ln w="12700" cmpd="sng">
-            <a:solidFill>
-              <a:schemeClr val="tx1">
-                <a:lumMod val="50000"/>
-                <a:lumOff val="50000"/>
-              </a:schemeClr>
-            </a:solidFill>
-            <a:prstDash val="sysDash"/>
-            <a:headEnd type="none"/>
-            <a:tailEnd type="arrow"/>
-          </a:ln>
-        </p:spPr>
-        <p:style>
-          <a:lnRef idx="2">
-            <a:schemeClr val="accent1"/>
-          </a:lnRef>
-          <a:fillRef idx="0">
-            <a:schemeClr val="accent1"/>
-          </a:fillRef>
-          <a:effectRef idx="1">
-            <a:schemeClr val="accent1"/>
-          </a:effectRef>
-          <a:fontRef idx="minor">
-            <a:schemeClr val="tx1"/>
-          </a:fontRef>
-        </p:style>
-      </p:cxnSp>
-      <p:sp>
-        <p:nvSpPr>
-          <p:cNvPr id="7" name="テキスト ボックス 6">
-            <a:extLst>
-              <a:ext uri="{FF2B5EF4-FFF2-40B4-BE49-F238E27FC236}">
-                <a16:creationId xmlns:a16="http://schemas.microsoft.com/office/drawing/2014/main" id="{087B0377-6B54-C89C-1B58-B9974065A7EA}"/>
-              </a:ext>
-            </a:extLst>
-          </p:cNvPr>
-          <p:cNvSpPr txBox="1"/>
-          <p:nvPr/>
-        </p:nvSpPr>
-        <p:spPr>
-          <a:xfrm>
-            <a:off x="7059694" y="1602878"/>
-            <a:ext cx="810851" cy="307777"/>
-          </a:xfrm>
-          <a:prstGeom prst="rect">
-            <a:avLst/>
-          </a:prstGeom>
-          <a:noFill/>
-        </p:spPr>
-        <p:txBody>
-          <a:bodyPr wrap="none" rtlCol="0">
-            <a:spAutoFit/>
-          </a:bodyPr>
-          <a:lstStyle/>
-          <a:p>
-            <a:r>
-              <a:rPr kumimoji="1" lang="en-US" altLang="ja-JP" sz="1400" dirty="0">
-                <a:solidFill>
-                  <a:schemeClr val="tx1">
-                    <a:lumMod val="50000"/>
-                    <a:lumOff val="50000"/>
-                  </a:schemeClr>
-                </a:solidFill>
-              </a:rPr>
-              <a:t>depends</a:t>
-            </a:r>
-            <a:endParaRPr kumimoji="1" lang="ja-JP" altLang="en-US" sz="1400" dirty="0">
-              <a:solidFill>
-                <a:schemeClr val="tx1">
-                  <a:lumMod val="50000"/>
-                  <a:lumOff val="50000"/>
-                </a:schemeClr>
-              </a:solidFill>
-            </a:endParaRPr>
-          </a:p>
-        </p:txBody>
-      </p:sp>
-    </p:spTree>
-    <p:extLst>
-      <p:ext uri="{BB962C8B-B14F-4D97-AF65-F5344CB8AC3E}">
-        <p14:creationId xmlns:p14="http://schemas.microsoft.com/office/powerpoint/2010/main" val="3064334524"/>
       </p:ext>
     </p:extLst>
   </p:cSld>
